--- a/docs/publishing/repository-walkthrough/files/repository-funktionsweise.pptx
+++ b/docs/publishing/repository-walkthrough/files/repository-funktionsweise.pptx
@@ -2,28 +2,28 @@
 <file path=ppt/presentation.xml><?xml version="1.0" encoding="utf-8"?>
 <p:presentation xmlns:p="http://schemas.openxmlformats.org/presentationml/2006/main">
   <p:sldMasterIdLst>
-    <p:sldMasterId xmlns:r="http://schemas.openxmlformats.org/officeDocument/2006/relationships" id="2147483648" r:id="R25d87c332dcb4d19"/>
+    <p:sldMasterId xmlns:r="http://schemas.openxmlformats.org/officeDocument/2006/relationships" id="2147483648" r:id="Re5683f22de9c4996"/>
   </p:sldMasterIdLst>
   <p:notesMasterIdLst>
-    <p:notesMasterId xmlns:r="http://schemas.openxmlformats.org/officeDocument/2006/relationships" r:id="Rcb76f5bdb2a54f3c"/>
+    <p:notesMasterId xmlns:r="http://schemas.openxmlformats.org/officeDocument/2006/relationships" r:id="R3854d7234d194e77"/>
   </p:notesMasterIdLst>
   <p:sldIdLst>
-    <p:sldId xmlns:r="http://schemas.openxmlformats.org/officeDocument/2006/relationships" id="256" r:id="R62ab70e029574c6b"/>
-    <p:sldId xmlns:r="http://schemas.openxmlformats.org/officeDocument/2006/relationships" id="257" r:id="Rbb63cd42cf89438d"/>
-    <p:sldId xmlns:r="http://schemas.openxmlformats.org/officeDocument/2006/relationships" id="258" r:id="R4aa0abb84f2e4ef5"/>
-    <p:sldId xmlns:r="http://schemas.openxmlformats.org/officeDocument/2006/relationships" id="259" r:id="R6996516e63004f84"/>
-    <p:sldId xmlns:r="http://schemas.openxmlformats.org/officeDocument/2006/relationships" id="260" r:id="Ra696ed7b7ab94f93"/>
-    <p:sldId xmlns:r="http://schemas.openxmlformats.org/officeDocument/2006/relationships" id="261" r:id="Rd5a9a48e8cf14919"/>
-    <p:sldId xmlns:r="http://schemas.openxmlformats.org/officeDocument/2006/relationships" id="262" r:id="Rf29cef2c20af4874"/>
-    <p:sldId xmlns:r="http://schemas.openxmlformats.org/officeDocument/2006/relationships" id="263" r:id="R6ed8d2dcc2704548"/>
-    <p:sldId xmlns:r="http://schemas.openxmlformats.org/officeDocument/2006/relationships" id="264" r:id="Re8813b48d61d4dfa"/>
-    <p:sldId xmlns:r="http://schemas.openxmlformats.org/officeDocument/2006/relationships" id="265" r:id="R38685992fc804d32"/>
-    <p:sldId xmlns:r="http://schemas.openxmlformats.org/officeDocument/2006/relationships" id="266" r:id="R6d13f5d571c64471"/>
-    <p:sldId xmlns:r="http://schemas.openxmlformats.org/officeDocument/2006/relationships" id="267" r:id="R74778e31ecbd4d1a"/>
-    <p:sldId xmlns:r="http://schemas.openxmlformats.org/officeDocument/2006/relationships" id="268" r:id="R5f5dba47e1aa441d"/>
-    <p:sldId xmlns:r="http://schemas.openxmlformats.org/officeDocument/2006/relationships" id="269" r:id="R4386a518fdb44062"/>
-    <p:sldId xmlns:r="http://schemas.openxmlformats.org/officeDocument/2006/relationships" id="270" r:id="R8e2e9bf1eed64d79"/>
-    <p:sldId xmlns:r="http://schemas.openxmlformats.org/officeDocument/2006/relationships" id="271" r:id="R007ee69c66b245bc"/>
+    <p:sldId xmlns:r="http://schemas.openxmlformats.org/officeDocument/2006/relationships" id="256" r:id="R9924a3b4cbd24a0d"/>
+    <p:sldId xmlns:r="http://schemas.openxmlformats.org/officeDocument/2006/relationships" id="257" r:id="Rd40b591905fc4836"/>
+    <p:sldId xmlns:r="http://schemas.openxmlformats.org/officeDocument/2006/relationships" id="258" r:id="R4418eb9b4a3d496d"/>
+    <p:sldId xmlns:r="http://schemas.openxmlformats.org/officeDocument/2006/relationships" id="259" r:id="Rd25867ab3c034b1c"/>
+    <p:sldId xmlns:r="http://schemas.openxmlformats.org/officeDocument/2006/relationships" id="260" r:id="Ra27bbb246b384adb"/>
+    <p:sldId xmlns:r="http://schemas.openxmlformats.org/officeDocument/2006/relationships" id="261" r:id="R7d6714afda9748fc"/>
+    <p:sldId xmlns:r="http://schemas.openxmlformats.org/officeDocument/2006/relationships" id="262" r:id="Re9c1119b127044aa"/>
+    <p:sldId xmlns:r="http://schemas.openxmlformats.org/officeDocument/2006/relationships" id="263" r:id="R6a91988c235a40a7"/>
+    <p:sldId xmlns:r="http://schemas.openxmlformats.org/officeDocument/2006/relationships" id="264" r:id="R2ba16b15b6c34e09"/>
+    <p:sldId xmlns:r="http://schemas.openxmlformats.org/officeDocument/2006/relationships" id="265" r:id="Re04ce4f3a0b34913"/>
+    <p:sldId xmlns:r="http://schemas.openxmlformats.org/officeDocument/2006/relationships" id="266" r:id="Rcc6d4664ca2a4253"/>
+    <p:sldId xmlns:r="http://schemas.openxmlformats.org/officeDocument/2006/relationships" id="267" r:id="R84e48f0294f34afa"/>
+    <p:sldId xmlns:r="http://schemas.openxmlformats.org/officeDocument/2006/relationships" id="268" r:id="Rc8c1ccc625fb445b"/>
+    <p:sldId xmlns:r="http://schemas.openxmlformats.org/officeDocument/2006/relationships" id="269" r:id="R50265ce62c054308"/>
+    <p:sldId xmlns:r="http://schemas.openxmlformats.org/officeDocument/2006/relationships" id="270" r:id="R357522b711ea40e3"/>
+    <p:sldId xmlns:r="http://schemas.openxmlformats.org/officeDocument/2006/relationships" id="271" r:id="R67b73dd5dcc44347"/>
   </p:sldIdLst>
   <p:sldSz cx="12192000" cy="6858000"/>
   <p:notesSz cx="6858000" cy="9144000"/>
@@ -467,7 +467,7 @@
           </a:p>
           <a:p xmlns:a="http://schemas.openxmlformats.org/drawingml/2006/main">
             <a:r>
-              <a:t>Quellstand: 80ba315e56828f5186303045cc2792b576396c26</a:t>
+              <a:t>Quellstand: 4abe88294f299d7f801c74ff0161df234960c092</a:t>
             </a:r>
           </a:p>
           <a:p xmlns:a="http://schemas.openxmlformats.org/drawingml/2006/main">
@@ -477,7 +477,7 @@
           </a:p>
           <a:p xmlns:a="http://schemas.openxmlformats.org/drawingml/2006/main">
             <a:r>
-              <a:t>https://github.com/joku-dev/devsecops-governance-framework/blob/80ba315e56828f5186303045cc2792b576396c26/docs/foundation/04_REFERENCE_ARCHITECTURE.md</a:t>
+              <a:t>https://github.com/joku-dev/devsecops-governance-framework/blob/4abe88294f299d7f801c74ff0161df234960c092/docs/foundation/04_REFERENCE_ARCHITECTURE.md</a:t>
             </a:r>
           </a:p>
           <a:p xmlns:a="http://schemas.openxmlformats.org/drawingml/2006/main">
@@ -492,7 +492,7 @@
           </a:p>
           <a:p xmlns:a="http://schemas.openxmlformats.org/drawingml/2006/main">
             <a:r>
-              <a:t>https://github.com/joku-dev/devsecops-governance-framework/blob/80ba315e56828f5186303045cc2792b576396c26/docs/demos/demo-end-to-end-governance.md</a:t>
+              <a:t>https://github.com/joku-dev/devsecops-governance-framework/blob/4abe88294f299d7f801c74ff0161df234960c092/docs/demos/demo-end-to-end-governance.md</a:t>
             </a:r>
           </a:p>
         </p:txBody>
@@ -572,7 +572,7 @@
           </a:p>
           <a:p xmlns:a="http://schemas.openxmlformats.org/drawingml/2006/main">
             <a:r>
-              <a:t>Quellstand: 80ba315e56828f5186303045cc2792b576396c26</a:t>
+              <a:t>Quellstand: 4abe88294f299d7f801c74ff0161df234960c092</a:t>
             </a:r>
           </a:p>
           <a:p xmlns:a="http://schemas.openxmlformats.org/drawingml/2006/main">
@@ -582,7 +582,7 @@
           </a:p>
           <a:p xmlns:a="http://schemas.openxmlformats.org/drawingml/2006/main">
             <a:r>
-              <a:t>https://github.com/joku-dev/devsecops-governance-framework/blob/80ba315e56828f5186303045cc2792b576396c26/model/controls/dscb-l1.yaml</a:t>
+              <a:t>https://github.com/joku-dev/devsecops-governance-framework/blob/4abe88294f299d7f801c74ff0161df234960c092/model/controls/dscb-l1.yaml</a:t>
             </a:r>
           </a:p>
           <a:p xmlns:a="http://schemas.openxmlformats.org/drawingml/2006/main">
@@ -597,7 +597,7 @@
           </a:p>
           <a:p xmlns:a="http://schemas.openxmlformats.org/drawingml/2006/main">
             <a:r>
-              <a:t>https://github.com/joku-dev/devsecops-governance-framework/blob/80ba315e56828f5186303045cc2792b576396c26/architecture/review-gates.yaml</a:t>
+              <a:t>https://github.com/joku-dev/devsecops-governance-framework/blob/4abe88294f299d7f801c74ff0161df234960c092/architecture/review-gates.yaml</a:t>
             </a:r>
           </a:p>
           <a:p xmlns:a="http://schemas.openxmlformats.org/drawingml/2006/main">
@@ -612,7 +612,7 @@
           </a:p>
           <a:p xmlns:a="http://schemas.openxmlformats.org/drawingml/2006/main">
             <a:r>
-              <a:t>https://github.com/joku-dev/devsecops-governance-framework/blob/80ba315e56828f5186303045cc2792b576396c26/docs/demos/demo-end-to-end-governance.md</a:t>
+              <a:t>https://github.com/joku-dev/devsecops-governance-framework/blob/4abe88294f299d7f801c74ff0161df234960c092/docs/demos/demo-end-to-end-governance.md</a:t>
             </a:r>
           </a:p>
         </p:txBody>
@@ -692,7 +692,7 @@
           </a:p>
           <a:p xmlns:a="http://schemas.openxmlformats.org/drawingml/2006/main">
             <a:r>
-              <a:t>Quellstand: 80ba315e56828f5186303045cc2792b576396c26</a:t>
+              <a:t>Quellstand: 4abe88294f299d7f801c74ff0161df234960c092</a:t>
             </a:r>
           </a:p>
           <a:p xmlns:a="http://schemas.openxmlformats.org/drawingml/2006/main">
@@ -702,7 +702,7 @@
           </a:p>
           <a:p xmlns:a="http://schemas.openxmlformats.org/drawingml/2006/main">
             <a:r>
-              <a:t>https://github.com/joku-dev/devsecops-governance-framework/blob/80ba315e56828f5186303045cc2792b576396c26/docs/operations/evidence/governance-result-intake-and-viewer-usage.md</a:t>
+              <a:t>https://github.com/joku-dev/devsecops-governance-framework/blob/4abe88294f299d7f801c74ff0161df234960c092/docs/operations/evidence/governance-result-intake-and-viewer-usage.md</a:t>
             </a:r>
           </a:p>
           <a:p xmlns:a="http://schemas.openxmlformats.org/drawingml/2006/main">
@@ -717,7 +717,7 @@
           </a:p>
           <a:p xmlns:a="http://schemas.openxmlformats.org/drawingml/2006/main">
             <a:r>
-              <a:t>https://github.com/joku-dev/devsecops-governance-framework/blob/80ba315e56828f5186303045cc2792b576396c26/.github/workflows/intake-governance-result.yml</a:t>
+              <a:t>https://github.com/joku-dev/devsecops-governance-framework/blob/4abe88294f299d7f801c74ff0161df234960c092/.github/workflows/intake-governance-result.yml</a:t>
             </a:r>
           </a:p>
         </p:txBody>
@@ -797,7 +797,7 @@
           </a:p>
           <a:p xmlns:a="http://schemas.openxmlformats.org/drawingml/2006/main">
             <a:r>
-              <a:t>Quellstand: 80ba315e56828f5186303045cc2792b576396c26</a:t>
+              <a:t>Quellstand: 4abe88294f299d7f801c74ff0161df234960c092</a:t>
             </a:r>
           </a:p>
           <a:p xmlns:a="http://schemas.openxmlformats.org/drawingml/2006/main">
@@ -807,7 +807,7 @@
           </a:p>
           <a:p xmlns:a="http://schemas.openxmlformats.org/drawingml/2006/main">
             <a:r>
-              <a:t>https://github.com/joku-dev/devsecops-governance-framework/blob/80ba315e56828f5186303045cc2792b576396c26/docs/operations/evidence/governance-result-intake-and-viewer-usage.md</a:t>
+              <a:t>https://github.com/joku-dev/devsecops-governance-framework/blob/4abe88294f299d7f801c74ff0161df234960c092/docs/operations/evidence/governance-result-intake-and-viewer-usage.md</a:t>
             </a:r>
           </a:p>
         </p:txBody>
@@ -887,7 +887,7 @@
           </a:p>
           <a:p xmlns:a="http://schemas.openxmlformats.org/drawingml/2006/main">
             <a:r>
-              <a:t>Quellstand: 80ba315e56828f5186303045cc2792b576396c26</a:t>
+              <a:t>Quellstand: 4abe88294f299d7f801c74ff0161df234960c092</a:t>
             </a:r>
           </a:p>
           <a:p xmlns:a="http://schemas.openxmlformats.org/drawingml/2006/main">
@@ -897,7 +897,7 @@
           </a:p>
           <a:p xmlns:a="http://schemas.openxmlformats.org/drawingml/2006/main">
             <a:r>
-              <a:t>https://github.com/joku-dev/devsecops-governance-framework/blob/80ba315e56828f5186303045cc2792b576396c26/docs/operations/evidence/governance-evidence-contract.md</a:t>
+              <a:t>https://github.com/joku-dev/devsecops-governance-framework/blob/4abe88294f299d7f801c74ff0161df234960c092/docs/operations/evidence/governance-evidence-contract.md</a:t>
             </a:r>
           </a:p>
           <a:p xmlns:a="http://schemas.openxmlformats.org/drawingml/2006/main">
@@ -912,7 +912,7 @@
           </a:p>
           <a:p xmlns:a="http://schemas.openxmlformats.org/drawingml/2006/main">
             <a:r>
-              <a:t>https://github.com/joku-dev/devsecops-governance-framework/blob/80ba315e56828f5186303045cc2792b576396c26/docs/operations/evidence/governance-result-intake-and-viewer-usage.md</a:t>
+              <a:t>https://github.com/joku-dev/devsecops-governance-framework/blob/4abe88294f299d7f801c74ff0161df234960c092/docs/operations/evidence/governance-result-intake-and-viewer-usage.md</a:t>
             </a:r>
           </a:p>
           <a:p xmlns:a="http://schemas.openxmlformats.org/drawingml/2006/main">
@@ -927,7 +927,7 @@
           </a:p>
           <a:p xmlns:a="http://schemas.openxmlformats.org/drawingml/2006/main">
             <a:r>
-              <a:t>https://github.com/joku-dev/devsecops-governance-framework/blob/80ba315e56828f5186303045cc2792b576396c26/docs/operations/evidence/evidence-trust-model.md</a:t>
+              <a:t>https://github.com/joku-dev/devsecops-governance-framework/blob/4abe88294f299d7f801c74ff0161df234960c092/docs/operations/evidence/evidence-trust-model.md</a:t>
             </a:r>
           </a:p>
         </p:txBody>
@@ -1007,7 +1007,7 @@
           </a:p>
           <a:p xmlns:a="http://schemas.openxmlformats.org/drawingml/2006/main">
             <a:r>
-              <a:t>Quellstand: 80ba315e56828f5186303045cc2792b576396c26</a:t>
+              <a:t>Quellstand: 4abe88294f299d7f801c74ff0161df234960c092</a:t>
             </a:r>
           </a:p>
           <a:p xmlns:a="http://schemas.openxmlformats.org/drawingml/2006/main">
@@ -1017,7 +1017,7 @@
           </a:p>
           <a:p xmlns:a="http://schemas.openxmlformats.org/drawingml/2006/main">
             <a:r>
-              <a:t>https://github.com/joku-dev/devsecops-governance-framework/blob/80ba315e56828f5186303045cc2792b576396c26/.github/workflows/architecture-baseline-l1-v0.1.0.yml</a:t>
+              <a:t>https://github.com/joku-dev/devsecops-governance-framework/blob/4abe88294f299d7f801c74ff0161df234960c092/.github/workflows/architecture-baseline-l1-v0.1.0.yml</a:t>
             </a:r>
           </a:p>
           <a:p xmlns:a="http://schemas.openxmlformats.org/drawingml/2006/main">
@@ -1032,7 +1032,7 @@
           </a:p>
           <a:p xmlns:a="http://schemas.openxmlformats.org/drawingml/2006/main">
             <a:r>
-              <a:t>https://github.com/joku-dev/devsecops-governance-framework/blob/80ba315e56828f5186303045cc2792b576396c26/docs/operations/guides/governance-repository-operations-handbook.md</a:t>
+              <a:t>https://github.com/joku-dev/devsecops-governance-framework/blob/4abe88294f299d7f801c74ff0161df234960c092/docs/operations/guides/governance-repository-operations-handbook.md</a:t>
             </a:r>
           </a:p>
           <a:p xmlns:a="http://schemas.openxmlformats.org/drawingml/2006/main">
@@ -1047,7 +1047,7 @@
           </a:p>
           <a:p xmlns:a="http://schemas.openxmlformats.org/drawingml/2006/main">
             <a:r>
-              <a:t>https://github.com/joku-dev/devsecops-governance-framework/blob/80ba315e56828f5186303045cc2792b576396c26/docs/demos/demo-end-to-end-governance.md</a:t>
+              <a:t>https://github.com/joku-dev/devsecops-governance-framework/blob/4abe88294f299d7f801c74ff0161df234960c092/docs/demos/demo-end-to-end-governance.md</a:t>
             </a:r>
           </a:p>
           <a:p xmlns:a="http://schemas.openxmlformats.org/drawingml/2006/main">
@@ -1062,7 +1062,7 @@
           </a:p>
           <a:p xmlns:a="http://schemas.openxmlformats.org/drawingml/2006/main">
             <a:r>
-              <a:t>https://github.com/joku-dev/devsecops-governance-framework/blob/80ba315e56828f5186303045cc2792b576396c26/.github/workflows/devsecops-baseline-reusable.yml</a:t>
+              <a:t>https://github.com/joku-dev/devsecops-governance-framework/blob/4abe88294f299d7f801c74ff0161df234960c092/.github/workflows/devsecops-baseline-reusable.yml</a:t>
             </a:r>
           </a:p>
         </p:txBody>
@@ -1142,7 +1142,7 @@
           </a:p>
           <a:p xmlns:a="http://schemas.openxmlformats.org/drawingml/2006/main">
             <a:r>
-              <a:t>Quellstand: 80ba315e56828f5186303045cc2792b576396c26</a:t>
+              <a:t>Quellstand: 4abe88294f299d7f801c74ff0161df234960c092</a:t>
             </a:r>
           </a:p>
           <a:p xmlns:a="http://schemas.openxmlformats.org/drawingml/2006/main">
@@ -1152,7 +1152,7 @@
           </a:p>
           <a:p xmlns:a="http://schemas.openxmlformats.org/drawingml/2006/main">
             <a:r>
-              <a:t>https://github.com/joku-dev/devsecops-governance-framework/blob/80ba315e56828f5186303045cc2792b576396c26/docs/operations/evidence/governance-result-intake-and-viewer-usage.md</a:t>
+              <a:t>https://github.com/joku-dev/devsecops-governance-framework/blob/4abe88294f299d7f801c74ff0161df234960c092/docs/operations/evidence/governance-result-intake-and-viewer-usage.md</a:t>
             </a:r>
           </a:p>
           <a:p xmlns:a="http://schemas.openxmlformats.org/drawingml/2006/main">
@@ -1167,7 +1167,7 @@
           </a:p>
           <a:p xmlns:a="http://schemas.openxmlformats.org/drawingml/2006/main">
             <a:r>
-              <a:t>https://github.com/joku-dev/devsecops-governance-framework/blob/80ba315e56828f5186303045cc2792b576396c26/.github/workflows/intake-governance-result.yml</a:t>
+              <a:t>https://github.com/joku-dev/devsecops-governance-framework/blob/4abe88294f299d7f801c74ff0161df234960c092/.github/workflows/intake-governance-result.yml</a:t>
             </a:r>
           </a:p>
           <a:p xmlns:a="http://schemas.openxmlformats.org/drawingml/2006/main">
@@ -1182,7 +1182,7 @@
           </a:p>
           <a:p xmlns:a="http://schemas.openxmlformats.org/drawingml/2006/main">
             <a:r>
-              <a:t>https://github.com/joku-dev/devsecops-governance-framework/blob/80ba315e56828f5186303045cc2792b576396c26/docs/operations/guides/governance-repository-operations-handbook.md</a:t>
+              <a:t>https://github.com/joku-dev/devsecops-governance-framework/blob/4abe88294f299d7f801c74ff0161df234960c092/docs/operations/guides/governance-repository-operations-handbook.md</a:t>
             </a:r>
           </a:p>
           <a:p xmlns:a="http://schemas.openxmlformats.org/drawingml/2006/main">
@@ -1197,7 +1197,7 @@
           </a:p>
           <a:p xmlns:a="http://schemas.openxmlformats.org/drawingml/2006/main">
             <a:r>
-              <a:t>https://github.com/joku-dev/devsecops-governance-framework/blob/80ba315e56828f5186303045cc2792b576396c26/docs/operations/status/daily-governance-operations.md</a:t>
+              <a:t>https://github.com/joku-dev/devsecops-governance-framework/blob/4abe88294f299d7f801c74ff0161df234960c092/docs/operations/status/daily-governance-operations.md</a:t>
             </a:r>
           </a:p>
         </p:txBody>
@@ -1267,7 +1267,7 @@
           <a:lstStyle xmlns:a="http://schemas.openxmlformats.org/drawingml/2006/main"/>
           <a:p xmlns:a="http://schemas.openxmlformats.org/drawingml/2006/main">
             <a:r>
-              <a:t>Zum Abschluss kann der Vortragende den Viewer, einen Ergebnis-Snapshot, die Baseline, DSCB-L1-REQ-006 und sbom_required.rego öffnen. Der Demo-Runbook enthält dafür historische ha-CPsWMS-Läufe vom 15. Juli 2026. Diese sind Referenzbelege und keine aktuelle Anwendungsevaluation. Der Nutzen des Systems liegt darin, genau diese Zuordnung nachvollziehbar zu machen und Änderungen kontrolliert fortzuschreiben.</a:t>
+              <a:t>Zum Abschluss den Viewer, einen Ergebnis-Snapshot, die Baseline, DSCB-L1-REQ-006 und sbom_required.rego öffnen. Der Demo-Runbook verwendet die angenommenen ha-CPsWMS-mainline-Läufe vom 11. September 2026: DevSecOps 34602002201 und Architektur 34602001140. Die 16 anwendbaren Controls und vier Architekturgates bestehen, ein separater DevSecOps-Replay-Befund bleibt offen. Vor einem späteren Vortrag die aktuelle Indexauswahl und Zeitstempel prüfen. Die Zuordnung zur Quelle bleibt der zentrale Nutzen des Rundgangs.</a:t>
             </a:r>
           </a:p>
           <a:p xmlns:a="http://schemas.openxmlformats.org/drawingml/2006/main">
@@ -1277,7 +1277,7 @@
           </a:p>
           <a:p xmlns:a="http://schemas.openxmlformats.org/drawingml/2006/main">
             <a:r>
-              <a:t>Quellstand: 80ba315e56828f5186303045cc2792b576396c26</a:t>
+              <a:t>Quellstand: 4abe88294f299d7f801c74ff0161df234960c092</a:t>
             </a:r>
           </a:p>
           <a:p xmlns:a="http://schemas.openxmlformats.org/drawingml/2006/main">
@@ -1287,7 +1287,7 @@
           </a:p>
           <a:p xmlns:a="http://schemas.openxmlformats.org/drawingml/2006/main">
             <a:r>
-              <a:t>https://github.com/joku-dev/devsecops-governance-framework/blob/80ba315e56828f5186303045cc2792b576396c26/docs/governance/governance-change-lifecycle.md</a:t>
+              <a:t>https://github.com/joku-dev/devsecops-governance-framework/blob/4abe88294f299d7f801c74ff0161df234960c092/docs/governance/governance-change-lifecycle.md</a:t>
             </a:r>
           </a:p>
           <a:p xmlns:a="http://schemas.openxmlformats.org/drawingml/2006/main">
@@ -1302,7 +1302,7 @@
           </a:p>
           <a:p xmlns:a="http://schemas.openxmlformats.org/drawingml/2006/main">
             <a:r>
-              <a:t>https://github.com/joku-dev/devsecops-governance-framework/blob/80ba315e56828f5186303045cc2792b576396c26/model/controls/dscb-l1.yaml</a:t>
+              <a:t>https://github.com/joku-dev/devsecops-governance-framework/blob/4abe88294f299d7f801c74ff0161df234960c092/model/controls/dscb-l1.yaml</a:t>
             </a:r>
           </a:p>
           <a:p xmlns:a="http://schemas.openxmlformats.org/drawingml/2006/main">
@@ -1317,7 +1317,7 @@
           </a:p>
           <a:p xmlns:a="http://schemas.openxmlformats.org/drawingml/2006/main">
             <a:r>
-              <a:t>https://github.com/joku-dev/devsecops-governance-framework/blob/80ba315e56828f5186303045cc2792b576396c26/policies/opa/sbom_required.rego</a:t>
+              <a:t>https://github.com/joku-dev/devsecops-governance-framework/blob/4abe88294f299d7f801c74ff0161df234960c092/policies/opa/sbom_required.rego</a:t>
             </a:r>
           </a:p>
           <a:p xmlns:a="http://schemas.openxmlformats.org/drawingml/2006/main">
@@ -1332,7 +1332,7 @@
           </a:p>
           <a:p xmlns:a="http://schemas.openxmlformats.org/drawingml/2006/main">
             <a:r>
-              <a:t>https://github.com/joku-dev/devsecops-governance-framework/blob/80ba315e56828f5186303045cc2792b576396c26/docs/operations/evidence/governance-result-intake-and-viewer-usage.md</a:t>
+              <a:t>https://github.com/joku-dev/devsecops-governance-framework/blob/4abe88294f299d7f801c74ff0161df234960c092/docs/operations/evidence/governance-result-intake-and-viewer-usage.md</a:t>
             </a:r>
           </a:p>
           <a:p xmlns:a="http://schemas.openxmlformats.org/drawingml/2006/main">
@@ -1347,7 +1347,37 @@
           </a:p>
           <a:p xmlns:a="http://schemas.openxmlformats.org/drawingml/2006/main">
             <a:r>
-              <a:t>https://github.com/joku-dev/devsecops-governance-framework/blob/80ba315e56828f5186303045cc2792b576396c26/docs/demos/demo-end-to-end-governance.md</a:t>
+              <a:t>https://github.com/joku-dev/devsecops-governance-framework/blob/4abe88294f299d7f801c74ff0161df234960c092/docs/demos/demo-end-to-end-governance.md</a:t>
+            </a:r>
+          </a:p>
+          <a:p xmlns:a="http://schemas.openxmlformats.org/drawingml/2006/main">
+            <a:r>
+              <a:t/>
+            </a:r>
+          </a:p>
+          <a:p xmlns:a="http://schemas.openxmlformats.org/drawingml/2006/main">
+            <a:r>
+              <a:t>[17] Angenommene DevSecOps-Ergebnisse</a:t>
+            </a:r>
+          </a:p>
+          <a:p xmlns:a="http://schemas.openxmlformats.org/drawingml/2006/main">
+            <a:r>
+              <a:t>https://github.com/joku-dev/devsecops-governance-framework/blob/4abe88294f299d7f801c74ff0161df234960c092/status/repository-results-index.json</a:t>
+            </a:r>
+          </a:p>
+          <a:p xmlns:a="http://schemas.openxmlformats.org/drawingml/2006/main">
+            <a:r>
+              <a:t/>
+            </a:r>
+          </a:p>
+          <a:p xmlns:a="http://schemas.openxmlformats.org/drawingml/2006/main">
+            <a:r>
+              <a:t>[18] Angenommene Architektur-Ergebnisse</a:t>
+            </a:r>
+          </a:p>
+          <a:p xmlns:a="http://schemas.openxmlformats.org/drawingml/2006/main">
+            <a:r>
+              <a:t>https://github.com/joku-dev/devsecops-governance-framework/blob/4abe88294f299d7f801c74ff0161df234960c092/status/architecture-results-index.json</a:t>
             </a:r>
           </a:p>
         </p:txBody>
@@ -1427,7 +1457,7 @@
           </a:p>
           <a:p xmlns:a="http://schemas.openxmlformats.org/drawingml/2006/main">
             <a:r>
-              <a:t>Quellstand: 80ba315e56828f5186303045cc2792b576396c26</a:t>
+              <a:t>Quellstand: 4abe88294f299d7f801c74ff0161df234960c092</a:t>
             </a:r>
           </a:p>
           <a:p xmlns:a="http://schemas.openxmlformats.org/drawingml/2006/main">
@@ -1437,7 +1467,7 @@
           </a:p>
           <a:p xmlns:a="http://schemas.openxmlformats.org/drawingml/2006/main">
             <a:r>
-              <a:t>https://github.com/joku-dev/devsecops-governance-framework/blob/80ba315e56828f5186303045cc2792b576396c26/docs/foundation/04_REFERENCE_ARCHITECTURE.md</a:t>
+              <a:t>https://github.com/joku-dev/devsecops-governance-framework/blob/4abe88294f299d7f801c74ff0161df234960c092/docs/foundation/04_REFERENCE_ARCHITECTURE.md</a:t>
             </a:r>
           </a:p>
           <a:p xmlns:a="http://schemas.openxmlformats.org/drawingml/2006/main">
@@ -1452,7 +1482,7 @@
           </a:p>
           <a:p xmlns:a="http://schemas.openxmlformats.org/drawingml/2006/main">
             <a:r>
-              <a:t>https://github.com/joku-dev/devsecops-governance-framework/blob/80ba315e56828f5186303045cc2792b576396c26/docs/governance/governance-change-lifecycle.md</a:t>
+              <a:t>https://github.com/joku-dev/devsecops-governance-framework/blob/4abe88294f299d7f801c74ff0161df234960c092/docs/governance/governance-change-lifecycle.md</a:t>
             </a:r>
           </a:p>
           <a:p xmlns:a="http://schemas.openxmlformats.org/drawingml/2006/main">
@@ -1467,7 +1497,7 @@
           </a:p>
           <a:p xmlns:a="http://schemas.openxmlformats.org/drawingml/2006/main">
             <a:r>
-              <a:t>https://github.com/joku-dev/devsecops-governance-framework/blob/80ba315e56828f5186303045cc2792b576396c26/docs/operations/evidence/governance-result-intake-and-viewer-usage.md</a:t>
+              <a:t>https://github.com/joku-dev/devsecops-governance-framework/blob/4abe88294f299d7f801c74ff0161df234960c092/docs/operations/evidence/governance-result-intake-and-viewer-usage.md</a:t>
             </a:r>
           </a:p>
         </p:txBody>
@@ -1547,7 +1577,7 @@
           </a:p>
           <a:p xmlns:a="http://schemas.openxmlformats.org/drawingml/2006/main">
             <a:r>
-              <a:t>Quellstand: 80ba315e56828f5186303045cc2792b576396c26</a:t>
+              <a:t>Quellstand: 4abe88294f299d7f801c74ff0161df234960c092</a:t>
             </a:r>
           </a:p>
           <a:p xmlns:a="http://schemas.openxmlformats.org/drawingml/2006/main">
@@ -1557,7 +1587,7 @@
           </a:p>
           <a:p xmlns:a="http://schemas.openxmlformats.org/drawingml/2006/main">
             <a:r>
-              <a:t>https://github.com/joku-dev/devsecops-governance-framework/blob/80ba315e56828f5186303045cc2792b576396c26/docs/foundation/04_REFERENCE_ARCHITECTURE.md</a:t>
+              <a:t>https://github.com/joku-dev/devsecops-governance-framework/blob/4abe88294f299d7f801c74ff0161df234960c092/docs/foundation/04_REFERENCE_ARCHITECTURE.md</a:t>
             </a:r>
           </a:p>
           <a:p xmlns:a="http://schemas.openxmlformats.org/drawingml/2006/main">
@@ -1572,7 +1602,7 @@
           </a:p>
           <a:p xmlns:a="http://schemas.openxmlformats.org/drawingml/2006/main">
             <a:r>
-              <a:t>https://github.com/joku-dev/devsecops-governance-framework/blob/80ba315e56828f5186303045cc2792b576396c26/docs/operations/evidence/governance-result-intake-and-viewer-usage.md</a:t>
+              <a:t>https://github.com/joku-dev/devsecops-governance-framework/blob/4abe88294f299d7f801c74ff0161df234960c092/docs/operations/evidence/governance-result-intake-and-viewer-usage.md</a:t>
             </a:r>
           </a:p>
           <a:p xmlns:a="http://schemas.openxmlformats.org/drawingml/2006/main">
@@ -1587,7 +1617,7 @@
           </a:p>
           <a:p xmlns:a="http://schemas.openxmlformats.org/drawingml/2006/main">
             <a:r>
-              <a:t>https://github.com/joku-dev/devsecops-governance-framework/blob/80ba315e56828f5186303045cc2792b576396c26/docs/demos/demo-end-to-end-governance.md</a:t>
+              <a:t>https://github.com/joku-dev/devsecops-governance-framework/blob/4abe88294f299d7f801c74ff0161df234960c092/docs/demos/demo-end-to-end-governance.md</a:t>
             </a:r>
           </a:p>
         </p:txBody>
@@ -1667,7 +1697,7 @@
           </a:p>
           <a:p xmlns:a="http://schemas.openxmlformats.org/drawingml/2006/main">
             <a:r>
-              <a:t>Quellstand: 80ba315e56828f5186303045cc2792b576396c26</a:t>
+              <a:t>Quellstand: 4abe88294f299d7f801c74ff0161df234960c092</a:t>
             </a:r>
           </a:p>
           <a:p xmlns:a="http://schemas.openxmlformats.org/drawingml/2006/main">
@@ -1677,7 +1707,7 @@
           </a:p>
           <a:p xmlns:a="http://schemas.openxmlformats.org/drawingml/2006/main">
             <a:r>
-              <a:t>https://github.com/joku-dev/devsecops-governance-framework/blob/80ba315e56828f5186303045cc2792b576396c26/docs/foundation/04_REFERENCE_ARCHITECTURE.md</a:t>
+              <a:t>https://github.com/joku-dev/devsecops-governance-framework/blob/4abe88294f299d7f801c74ff0161df234960c092/docs/foundation/04_REFERENCE_ARCHITECTURE.md</a:t>
             </a:r>
           </a:p>
           <a:p xmlns:a="http://schemas.openxmlformats.org/drawingml/2006/main">
@@ -1692,7 +1722,7 @@
           </a:p>
           <a:p xmlns:a="http://schemas.openxmlformats.org/drawingml/2006/main">
             <a:r>
-              <a:t>https://github.com/joku-dev/devsecops-governance-framework/blob/80ba315e56828f5186303045cc2792b576396c26/docs/governance/governance-change-lifecycle.md</a:t>
+              <a:t>https://github.com/joku-dev/devsecops-governance-framework/blob/4abe88294f299d7f801c74ff0161df234960c092/docs/governance/governance-change-lifecycle.md</a:t>
             </a:r>
           </a:p>
           <a:p xmlns:a="http://schemas.openxmlformats.org/drawingml/2006/main">
@@ -1707,7 +1737,7 @@
           </a:p>
           <a:p xmlns:a="http://schemas.openxmlformats.org/drawingml/2006/main">
             <a:r>
-              <a:t>https://github.com/joku-dev/devsecops-governance-framework/blob/80ba315e56828f5186303045cc2792b576396c26/docs/operations/evidence/governance-result-intake-and-viewer-usage.md</a:t>
+              <a:t>https://github.com/joku-dev/devsecops-governance-framework/blob/4abe88294f299d7f801c74ff0161df234960c092/docs/operations/evidence/governance-result-intake-and-viewer-usage.md</a:t>
             </a:r>
           </a:p>
           <a:p xmlns:a="http://schemas.openxmlformats.org/drawingml/2006/main">
@@ -1722,7 +1752,7 @@
           </a:p>
           <a:p xmlns:a="http://schemas.openxmlformats.org/drawingml/2006/main">
             <a:r>
-              <a:t>https://github.com/joku-dev/devsecops-governance-framework/blob/80ba315e56828f5186303045cc2792b576396c26/releases/l1/v1.1.3/baseline-package.md</a:t>
+              <a:t>https://github.com/joku-dev/devsecops-governance-framework/blob/4abe88294f299d7f801c74ff0161df234960c092/releases/l1/v1.1.3/baseline-package.md</a:t>
             </a:r>
           </a:p>
           <a:p xmlns:a="http://schemas.openxmlformats.org/drawingml/2006/main">
@@ -1737,7 +1767,7 @@
           </a:p>
           <a:p xmlns:a="http://schemas.openxmlformats.org/drawingml/2006/main">
             <a:r>
-              <a:t>https://github.com/joku-dev/devsecops-governance-framework/blob/80ba315e56828f5186303045cc2792b576396c26/releases/architecture/l1/v0.1.0/baseline-package.md</a:t>
+              <a:t>https://github.com/joku-dev/devsecops-governance-framework/blob/4abe88294f299d7f801c74ff0161df234960c092/releases/architecture/l1/v0.1.0/baseline-package.md</a:t>
             </a:r>
           </a:p>
         </p:txBody>
@@ -1817,7 +1847,7 @@
           </a:p>
           <a:p xmlns:a="http://schemas.openxmlformats.org/drawingml/2006/main">
             <a:r>
-              <a:t>Quellstand: 80ba315e56828f5186303045cc2792b576396c26</a:t>
+              <a:t>Quellstand: 4abe88294f299d7f801c74ff0161df234960c092</a:t>
             </a:r>
           </a:p>
           <a:p xmlns:a="http://schemas.openxmlformats.org/drawingml/2006/main">
@@ -1827,7 +1857,7 @@
           </a:p>
           <a:p xmlns:a="http://schemas.openxmlformats.org/drawingml/2006/main">
             <a:r>
-              <a:t>https://github.com/joku-dev/devsecops-governance-framework/blob/80ba315e56828f5186303045cc2792b576396c26/docs/governance/governance-change-lifecycle.md</a:t>
+              <a:t>https://github.com/joku-dev/devsecops-governance-framework/blob/4abe88294f299d7f801c74ff0161df234960c092/docs/governance/governance-change-lifecycle.md</a:t>
             </a:r>
           </a:p>
           <a:p xmlns:a="http://schemas.openxmlformats.org/drawingml/2006/main">
@@ -1842,7 +1872,7 @@
           </a:p>
           <a:p xmlns:a="http://schemas.openxmlformats.org/drawingml/2006/main">
             <a:r>
-              <a:t>https://github.com/joku-dev/devsecops-governance-framework/blob/80ba315e56828f5186303045cc2792b576396c26/docs/demos/demo-end-to-end-governance.md</a:t>
+              <a:t>https://github.com/joku-dev/devsecops-governance-framework/blob/4abe88294f299d7f801c74ff0161df234960c092/docs/demos/demo-end-to-end-governance.md</a:t>
             </a:r>
           </a:p>
         </p:txBody>
@@ -1922,7 +1952,7 @@
           </a:p>
           <a:p xmlns:a="http://schemas.openxmlformats.org/drawingml/2006/main">
             <a:r>
-              <a:t>Quellstand: 80ba315e56828f5186303045cc2792b576396c26</a:t>
+              <a:t>Quellstand: 4abe88294f299d7f801c74ff0161df234960c092</a:t>
             </a:r>
           </a:p>
           <a:p xmlns:a="http://schemas.openxmlformats.org/drawingml/2006/main">
@@ -1932,7 +1962,7 @@
           </a:p>
           <a:p xmlns:a="http://schemas.openxmlformats.org/drawingml/2006/main">
             <a:r>
-              <a:t>https://github.com/joku-dev/devsecops-governance-framework/blob/80ba315e56828f5186303045cc2792b576396c26/model/controls/dscb-l1.yaml</a:t>
+              <a:t>https://github.com/joku-dev/devsecops-governance-framework/blob/4abe88294f299d7f801c74ff0161df234960c092/model/controls/dscb-l1.yaml</a:t>
             </a:r>
           </a:p>
           <a:p xmlns:a="http://schemas.openxmlformats.org/drawingml/2006/main">
@@ -1947,7 +1977,7 @@
           </a:p>
           <a:p xmlns:a="http://schemas.openxmlformats.org/drawingml/2006/main">
             <a:r>
-              <a:t>https://github.com/joku-dev/devsecops-governance-framework/blob/80ba315e56828f5186303045cc2792b576396c26/policies/opa/sbom_required.rego</a:t>
+              <a:t>https://github.com/joku-dev/devsecops-governance-framework/blob/4abe88294f299d7f801c74ff0161df234960c092/policies/opa/sbom_required.rego</a:t>
             </a:r>
           </a:p>
         </p:txBody>
@@ -2027,7 +2057,7 @@
           </a:p>
           <a:p xmlns:a="http://schemas.openxmlformats.org/drawingml/2006/main">
             <a:r>
-              <a:t>Quellstand: 80ba315e56828f5186303045cc2792b576396c26</a:t>
+              <a:t>Quellstand: 4abe88294f299d7f801c74ff0161df234960c092</a:t>
             </a:r>
           </a:p>
           <a:p xmlns:a="http://schemas.openxmlformats.org/drawingml/2006/main">
@@ -2037,7 +2067,7 @@
           </a:p>
           <a:p xmlns:a="http://schemas.openxmlformats.org/drawingml/2006/main">
             <a:r>
-              <a:t>https://github.com/joku-dev/devsecops-governance-framework/blob/80ba315e56828f5186303045cc2792b576396c26/policies/opa/sbom_required.rego</a:t>
+              <a:t>https://github.com/joku-dev/devsecops-governance-framework/blob/4abe88294f299d7f801c74ff0161df234960c092/policies/opa/sbom_required.rego</a:t>
             </a:r>
           </a:p>
         </p:txBody>
@@ -2117,7 +2147,7 @@
           </a:p>
           <a:p xmlns:a="http://schemas.openxmlformats.org/drawingml/2006/main">
             <a:r>
-              <a:t>Quellstand: 80ba315e56828f5186303045cc2792b576396c26</a:t>
+              <a:t>Quellstand: 4abe88294f299d7f801c74ff0161df234960c092</a:t>
             </a:r>
           </a:p>
           <a:p xmlns:a="http://schemas.openxmlformats.org/drawingml/2006/main">
@@ -2127,7 +2157,7 @@
           </a:p>
           <a:p xmlns:a="http://schemas.openxmlformats.org/drawingml/2006/main">
             <a:r>
-              <a:t>https://github.com/joku-dev/devsecops-governance-framework/blob/80ba315e56828f5186303045cc2792b576396c26/docs/operations/evidence/governance-evidence-contract.md</a:t>
+              <a:t>https://github.com/joku-dev/devsecops-governance-framework/blob/4abe88294f299d7f801c74ff0161df234960c092/docs/operations/evidence/governance-evidence-contract.md</a:t>
             </a:r>
           </a:p>
           <a:p xmlns:a="http://schemas.openxmlformats.org/drawingml/2006/main">
@@ -2142,7 +2172,7 @@
           </a:p>
           <a:p xmlns:a="http://schemas.openxmlformats.org/drawingml/2006/main">
             <a:r>
-              <a:t>https://github.com/joku-dev/devsecops-governance-framework/blob/80ba315e56828f5186303045cc2792b576396c26/releases/l1/v1.1.3/baseline-package.md</a:t>
+              <a:t>https://github.com/joku-dev/devsecops-governance-framework/blob/4abe88294f299d7f801c74ff0161df234960c092/releases/l1/v1.1.3/baseline-package.md</a:t>
             </a:r>
           </a:p>
           <a:p xmlns:a="http://schemas.openxmlformats.org/drawingml/2006/main">
@@ -2157,7 +2187,7 @@
           </a:p>
           <a:p xmlns:a="http://schemas.openxmlformats.org/drawingml/2006/main">
             <a:r>
-              <a:t>https://github.com/joku-dev/devsecops-governance-framework/blob/80ba315e56828f5186303045cc2792b576396c26/releases/architecture/l1/v0.1.0/baseline-package.md</a:t>
+              <a:t>https://github.com/joku-dev/devsecops-governance-framework/blob/4abe88294f299d7f801c74ff0161df234960c092/releases/architecture/l1/v0.1.0/baseline-package.md</a:t>
             </a:r>
           </a:p>
         </p:txBody>
@@ -2237,7 +2267,7 @@
           </a:p>
           <a:p xmlns:a="http://schemas.openxmlformats.org/drawingml/2006/main">
             <a:r>
-              <a:t>Quellstand: 80ba315e56828f5186303045cc2792b576396c26</a:t>
+              <a:t>Quellstand: 4abe88294f299d7f801c74ff0161df234960c092</a:t>
             </a:r>
           </a:p>
           <a:p xmlns:a="http://schemas.openxmlformats.org/drawingml/2006/main">
@@ -2247,7 +2277,7 @@
           </a:p>
           <a:p xmlns:a="http://schemas.openxmlformats.org/drawingml/2006/main">
             <a:r>
-              <a:t>https://github.com/joku-dev/devsecops-governance-framework/blob/80ba315e56828f5186303045cc2792b576396c26/.github/workflows/architecture-baseline-l1-v0.1.0.yml</a:t>
+              <a:t>https://github.com/joku-dev/devsecops-governance-framework/blob/4abe88294f299d7f801c74ff0161df234960c092/.github/workflows/architecture-baseline-l1-v0.1.0.yml</a:t>
             </a:r>
           </a:p>
         </p:txBody>
@@ -2315,7 +2345,7 @@
   </p:cSld>
   <p:clrMap bg1="lt1" tx1="dk1" bg2="lt2" tx2="dk2" accent1="accent1" accent2="accent2" accent3="accent3" accent4="accent4" accent5="accent5" accent6="accent6" hlink="hlink" folHlink="folHlink"/>
   <p:sldLayoutIdLst>
-    <p:sldLayoutId xmlns:r="http://schemas.openxmlformats.org/officeDocument/2006/relationships" id="2147483649" r:id="R6a1f803b02b84423"/>
+    <p:sldLayoutId xmlns:r="http://schemas.openxmlformats.org/officeDocument/2006/relationships" id="2147483649" r:id="R9d5f8e02fc474bf7"/>
   </p:sldLayoutIdLst>
   <p:txStyles>
     <p:titleStyle>
@@ -2866,7 +2896,7 @@
           <p:cNvPr id="4" name="">
             <a:extLst xmlns:a="http://schemas.openxmlformats.org/drawingml/2006/main">
               <a:ext uri="{FF2B5EF4-FFF2-40B4-BE49-F238E27FC236}">
-                <a16:creationId xmlns:a16="http://schemas.microsoft.com/office/drawing/2014/main" id="{239A67C9-3374-40EA-85D0-D6E9B8B0AB5F}"/>
+                <a16:creationId xmlns:a16="http://schemas.microsoft.com/office/drawing/2014/main" id="{DDA53DBA-BF1E-4AAD-86AE-96F259D17E9C}"/>
               </a:ext>
             </a:extLst>
           </p:cNvPr>
@@ -2923,7 +2953,7 @@
           <p:cNvPr id="2" name="">
             <a:extLst xmlns:a="http://schemas.openxmlformats.org/drawingml/2006/main">
               <a:ext uri="{FF2B5EF4-FFF2-40B4-BE49-F238E27FC236}">
-                <a16:creationId xmlns:a16="http://schemas.microsoft.com/office/drawing/2014/main" id="{B01AF25A-8660-4190-B6C0-7299A04BB88B}"/>
+                <a16:creationId xmlns:a16="http://schemas.microsoft.com/office/drawing/2014/main" id="{0532F6F3-91A2-4987-BBA9-F30D6AA06C7D}"/>
               </a:ext>
             </a:extLst>
           </p:cNvPr>
@@ -3003,7 +3033,7 @@
           <p:cNvPr id="3" name="">
             <a:extLst xmlns:a="http://schemas.openxmlformats.org/drawingml/2006/main">
               <a:ext uri="{FF2B5EF4-FFF2-40B4-BE49-F238E27FC236}">
-                <a16:creationId xmlns:a16="http://schemas.microsoft.com/office/drawing/2014/main" id="{2A69160C-4815-4E04-9424-4F1287E0E4F2}"/>
+                <a16:creationId xmlns:a16="http://schemas.microsoft.com/office/drawing/2014/main" id="{B44258E2-9957-4233-AF37-A6B4E3A79A8F}"/>
               </a:ext>
             </a:extLst>
           </p:cNvPr>
@@ -3050,7 +3080,7 @@
                 <a:ea typeface="Arial"/>
                 <a:cs typeface="Arial"/>
               </a:rPr>
-              <a:t>Stand 9. September 2026</a:t>
+              <a:t>Stand 11. September 2026</a:t>
             </a:r>
           </a:p>
         </p:txBody>
@@ -3058,7 +3088,7 @@
     </p:spTree>
     <p:extLst>
       <p:ext uri="{BB962C8B-B14F-4D97-AF65-F5344CB8AC3E}">
-        <p14:creationId xmlns:p14="http://schemas.microsoft.com/office/powerpoint/2010/main" val="1230717310"/>
+        <p14:creationId xmlns:p14="http://schemas.microsoft.com/office/powerpoint/2010/main" val="1795514107"/>
       </p:ext>
     </p:extLst>
   </p:cSld>
@@ -3089,7 +3119,7 @@
           <p:cNvPr id="8" name="">
             <a:extLst xmlns:a="http://schemas.openxmlformats.org/drawingml/2006/main">
               <a:ext uri="{FF2B5EF4-FFF2-40B4-BE49-F238E27FC236}">
-                <a16:creationId xmlns:a16="http://schemas.microsoft.com/office/drawing/2014/main" id="{CEE3C888-FE13-42A9-9502-DDD62251C5A1}"/>
+                <a16:creationId xmlns:a16="http://schemas.microsoft.com/office/drawing/2014/main" id="{CCE1982A-7D4E-4D23-AED2-9CE6698A4D05}"/>
               </a:ext>
             </a:extLst>
           </p:cNvPr>
@@ -3146,7 +3176,7 @@
           <p:cNvPr id="2" name="">
             <a:extLst xmlns:a="http://schemas.openxmlformats.org/drawingml/2006/main">
               <a:ext uri="{FF2B5EF4-FFF2-40B4-BE49-F238E27FC236}">
-                <a16:creationId xmlns:a16="http://schemas.microsoft.com/office/drawing/2014/main" id="{5CB31C9C-F147-4B1C-AE5F-0010B1D8F4DD}"/>
+                <a16:creationId xmlns:a16="http://schemas.microsoft.com/office/drawing/2014/main" id="{D71BDEF5-4CCA-4DEB-A0B2-351B1AE04322}"/>
               </a:ext>
             </a:extLst>
           </p:cNvPr>
@@ -3203,7 +3233,7 @@
           <p:cNvPr id="3" name="">
             <a:extLst xmlns:a="http://schemas.openxmlformats.org/drawingml/2006/main">
               <a:ext uri="{FF2B5EF4-FFF2-40B4-BE49-F238E27FC236}">
-                <a16:creationId xmlns:a16="http://schemas.microsoft.com/office/drawing/2014/main" id="{34FA472E-B72F-41A8-A12E-B35950ECCF06}"/>
+                <a16:creationId xmlns:a16="http://schemas.microsoft.com/office/drawing/2014/main" id="{58542E28-4CC7-4A38-BFBF-DCFD8B2DA5F8}"/>
               </a:ext>
             </a:extLst>
           </p:cNvPr>
@@ -3260,7 +3290,7 @@
           <p:cNvPr id="4" name="">
             <a:extLst xmlns:a="http://schemas.openxmlformats.org/drawingml/2006/main">
               <a:ext uri="{FF2B5EF4-FFF2-40B4-BE49-F238E27FC236}">
-                <a16:creationId xmlns:a16="http://schemas.microsoft.com/office/drawing/2014/main" id="{FEF61F14-0C7F-45C2-9414-810E65CC0701}"/>
+                <a16:creationId xmlns:a16="http://schemas.microsoft.com/office/drawing/2014/main" id="{AFD8F8FF-0AE7-4739-93C5-EDF111F622A6}"/>
               </a:ext>
             </a:extLst>
           </p:cNvPr>
@@ -3340,7 +3370,7 @@
           <p:cNvPr id="5" name="">
             <a:extLst xmlns:a="http://schemas.openxmlformats.org/drawingml/2006/main">
               <a:ext uri="{FF2B5EF4-FFF2-40B4-BE49-F238E27FC236}">
-                <a16:creationId xmlns:a16="http://schemas.microsoft.com/office/drawing/2014/main" id="{477560C5-359E-490F-AF3C-A6C8A242A187}"/>
+                <a16:creationId xmlns:a16="http://schemas.microsoft.com/office/drawing/2014/main" id="{A79D8E4D-89E4-4B13-80DD-4C07C17E7F35}"/>
               </a:ext>
             </a:extLst>
           </p:cNvPr>
@@ -3397,7 +3427,7 @@
           <p:cNvPr id="6" name="">
             <a:extLst xmlns:a="http://schemas.openxmlformats.org/drawingml/2006/main">
               <a:ext uri="{FF2B5EF4-FFF2-40B4-BE49-F238E27FC236}">
-                <a16:creationId xmlns:a16="http://schemas.microsoft.com/office/drawing/2014/main" id="{961E04C7-A133-4D88-A655-062910534EC1}"/>
+                <a16:creationId xmlns:a16="http://schemas.microsoft.com/office/drawing/2014/main" id="{EDD57C52-396C-44A1-919A-DBA073D1CBB6}"/>
               </a:ext>
             </a:extLst>
           </p:cNvPr>
@@ -3477,7 +3507,7 @@
           <p:cNvPr id="7" name="">
             <a:extLst xmlns:a="http://schemas.openxmlformats.org/drawingml/2006/main">
               <a:ext uri="{FF2B5EF4-FFF2-40B4-BE49-F238E27FC236}">
-                <a16:creationId xmlns:a16="http://schemas.microsoft.com/office/drawing/2014/main" id="{C16F1250-94DF-4D66-9A1E-8D9EF31894C6}"/>
+                <a16:creationId xmlns:a16="http://schemas.microsoft.com/office/drawing/2014/main" id="{FBC54FF8-7107-4EBB-8FC2-3ADB1638DFEC}"/>
               </a:ext>
             </a:extLst>
           </p:cNvPr>
@@ -3524,7 +3554,7 @@
                 <a:ea typeface="Arial"/>
                 <a:cs typeface="Arial"/>
               </a:rPr>
-              <a:t>9. September 2026     10 / 16</a:t>
+              <a:t>11. September 2026     10 / 16</a:t>
             </a:r>
           </a:p>
         </p:txBody>
@@ -3532,7 +3562,7 @@
     </p:spTree>
     <p:extLst>
       <p:ext uri="{BB962C8B-B14F-4D97-AF65-F5344CB8AC3E}">
-        <p14:creationId xmlns:p14="http://schemas.microsoft.com/office/powerpoint/2010/main" val="1180396291"/>
+        <p14:creationId xmlns:p14="http://schemas.microsoft.com/office/powerpoint/2010/main" val="587551451"/>
       </p:ext>
     </p:extLst>
   </p:cSld>
@@ -3563,7 +3593,7 @@
           <p:cNvPr id="12" name="">
             <a:extLst xmlns:a="http://schemas.openxmlformats.org/drawingml/2006/main">
               <a:ext uri="{FF2B5EF4-FFF2-40B4-BE49-F238E27FC236}">
-                <a16:creationId xmlns:a16="http://schemas.microsoft.com/office/drawing/2014/main" id="{D965B35B-4AAB-4FD5-9733-EA284188C5FD}"/>
+                <a16:creationId xmlns:a16="http://schemas.microsoft.com/office/drawing/2014/main" id="{7C10EF3D-087D-4BCF-8BEB-E4351A322D5B}"/>
               </a:ext>
             </a:extLst>
           </p:cNvPr>
@@ -3620,7 +3650,7 @@
           <p:cNvPr id="2" name="">
             <a:extLst xmlns:a="http://schemas.openxmlformats.org/drawingml/2006/main">
               <a:ext uri="{FF2B5EF4-FFF2-40B4-BE49-F238E27FC236}">
-                <a16:creationId xmlns:a16="http://schemas.microsoft.com/office/drawing/2014/main" id="{1A23CE8E-8818-41C6-88C9-5F2589DABF4E}"/>
+                <a16:creationId xmlns:a16="http://schemas.microsoft.com/office/drawing/2014/main" id="{39E04DEC-C38F-4016-B651-81236DC65ACF}"/>
               </a:ext>
             </a:extLst>
           </p:cNvPr>
@@ -3677,7 +3707,7 @@
           <p:cNvPr id="3" name="">
             <a:extLst xmlns:a="http://schemas.openxmlformats.org/drawingml/2006/main">
               <a:ext uri="{FF2B5EF4-FFF2-40B4-BE49-F238E27FC236}">
-                <a16:creationId xmlns:a16="http://schemas.microsoft.com/office/drawing/2014/main" id="{E1059F17-1E8D-4809-A1C8-EABFE70B5D83}"/>
+                <a16:creationId xmlns:a16="http://schemas.microsoft.com/office/drawing/2014/main" id="{D6CBC7A4-42C8-4DFB-9908-E4C786D5BB83}"/>
               </a:ext>
             </a:extLst>
           </p:cNvPr>
@@ -3734,7 +3764,7 @@
           <p:cNvPr id="4" name="">
             <a:extLst xmlns:a="http://schemas.openxmlformats.org/drawingml/2006/main">
               <a:ext uri="{FF2B5EF4-FFF2-40B4-BE49-F238E27FC236}">
-                <a16:creationId xmlns:a16="http://schemas.microsoft.com/office/drawing/2014/main" id="{5B1183B9-3DB3-44E3-8FAA-94F00D5C154F}"/>
+                <a16:creationId xmlns:a16="http://schemas.microsoft.com/office/drawing/2014/main" id="{976A6285-AC58-4E77-B2F4-3923BAAAF159}"/>
               </a:ext>
             </a:extLst>
           </p:cNvPr>
@@ -3791,7 +3821,7 @@
           <p:cNvPr id="5" name="">
             <a:extLst xmlns:a="http://schemas.openxmlformats.org/drawingml/2006/main">
               <a:ext uri="{FF2B5EF4-FFF2-40B4-BE49-F238E27FC236}">
-                <a16:creationId xmlns:a16="http://schemas.microsoft.com/office/drawing/2014/main" id="{B3CA2DC2-DE80-4D9D-8568-F4081559A8EF}"/>
+                <a16:creationId xmlns:a16="http://schemas.microsoft.com/office/drawing/2014/main" id="{4497EE4D-804A-46BC-900A-14E208823294}"/>
               </a:ext>
             </a:extLst>
           </p:cNvPr>
@@ -3848,7 +3878,7 @@
           <p:cNvPr id="6" name="">
             <a:extLst xmlns:a="http://schemas.openxmlformats.org/drawingml/2006/main">
               <a:ext uri="{FF2B5EF4-FFF2-40B4-BE49-F238E27FC236}">
-                <a16:creationId xmlns:a16="http://schemas.microsoft.com/office/drawing/2014/main" id="{CB60747E-9733-46F3-9377-18292E894AB7}"/>
+                <a16:creationId xmlns:a16="http://schemas.microsoft.com/office/drawing/2014/main" id="{9B978DE8-9F65-49EA-BA3D-820F7F56538F}"/>
               </a:ext>
             </a:extLst>
           </p:cNvPr>
@@ -3905,7 +3935,7 @@
           <p:cNvPr id="7" name="">
             <a:extLst xmlns:a="http://schemas.openxmlformats.org/drawingml/2006/main">
               <a:ext uri="{FF2B5EF4-FFF2-40B4-BE49-F238E27FC236}">
-                <a16:creationId xmlns:a16="http://schemas.microsoft.com/office/drawing/2014/main" id="{B954FB06-E12F-4954-99F2-E14999237557}"/>
+                <a16:creationId xmlns:a16="http://schemas.microsoft.com/office/drawing/2014/main" id="{3E80A0C4-8642-4897-B1A9-8C35FD076DEF}"/>
               </a:ext>
             </a:extLst>
           </p:cNvPr>
@@ -3962,7 +3992,7 @@
           <p:cNvPr id="8" name="">
             <a:extLst xmlns:a="http://schemas.openxmlformats.org/drawingml/2006/main">
               <a:ext uri="{FF2B5EF4-FFF2-40B4-BE49-F238E27FC236}">
-                <a16:creationId xmlns:a16="http://schemas.microsoft.com/office/drawing/2014/main" id="{1CD5938C-25E3-43A1-86BE-B259AE8FD2F1}"/>
+                <a16:creationId xmlns:a16="http://schemas.microsoft.com/office/drawing/2014/main" id="{4A3B2E5A-9BDD-4F69-A126-63CA6DA37280}"/>
               </a:ext>
             </a:extLst>
           </p:cNvPr>
@@ -4019,7 +4049,7 @@
           <p:cNvPr id="9" name="">
             <a:extLst xmlns:a="http://schemas.openxmlformats.org/drawingml/2006/main">
               <a:ext uri="{FF2B5EF4-FFF2-40B4-BE49-F238E27FC236}">
-                <a16:creationId xmlns:a16="http://schemas.microsoft.com/office/drawing/2014/main" id="{7565F621-9F2D-41F6-8C13-872A0B542D69}"/>
+                <a16:creationId xmlns:a16="http://schemas.microsoft.com/office/drawing/2014/main" id="{28256F9F-A213-401F-B6AF-5B22A32D613A}"/>
               </a:ext>
             </a:extLst>
           </p:cNvPr>
@@ -4076,7 +4106,7 @@
           <p:cNvPr id="10" name="">
             <a:extLst xmlns:a="http://schemas.openxmlformats.org/drawingml/2006/main">
               <a:ext uri="{FF2B5EF4-FFF2-40B4-BE49-F238E27FC236}">
-                <a16:creationId xmlns:a16="http://schemas.microsoft.com/office/drawing/2014/main" id="{1BFED4DE-DC47-4577-B700-DDF295F9C422}"/>
+                <a16:creationId xmlns:a16="http://schemas.microsoft.com/office/drawing/2014/main" id="{60DF8B43-5555-448E-B575-23BE5892AA6C}"/>
               </a:ext>
             </a:extLst>
           </p:cNvPr>
@@ -4133,7 +4163,7 @@
           <p:cNvPr id="11" name="">
             <a:extLst xmlns:a="http://schemas.openxmlformats.org/drawingml/2006/main">
               <a:ext uri="{FF2B5EF4-FFF2-40B4-BE49-F238E27FC236}">
-                <a16:creationId xmlns:a16="http://schemas.microsoft.com/office/drawing/2014/main" id="{69C9A856-6190-45CD-A490-9A5D8F9B86AE}"/>
+                <a16:creationId xmlns:a16="http://schemas.microsoft.com/office/drawing/2014/main" id="{A8733024-4452-4CF6-ABFD-5B9F9BB8797F}"/>
               </a:ext>
             </a:extLst>
           </p:cNvPr>
@@ -4180,7 +4210,7 @@
                 <a:ea typeface="Arial"/>
                 <a:cs typeface="Arial"/>
               </a:rPr>
-              <a:t>9. September 2026     11 / 16</a:t>
+              <a:t>11. September 2026     11 / 16</a:t>
             </a:r>
           </a:p>
         </p:txBody>
@@ -4188,7 +4218,7 @@
     </p:spTree>
     <p:extLst>
       <p:ext uri="{BB962C8B-B14F-4D97-AF65-F5344CB8AC3E}">
-        <p14:creationId xmlns:p14="http://schemas.microsoft.com/office/powerpoint/2010/main" val="1457212367"/>
+        <p14:creationId xmlns:p14="http://schemas.microsoft.com/office/powerpoint/2010/main" val="1369278413"/>
       </p:ext>
     </p:extLst>
   </p:cSld>
@@ -4219,7 +4249,7 @@
           <p:cNvPr id="10" name="">
             <a:extLst xmlns:a="http://schemas.openxmlformats.org/drawingml/2006/main">
               <a:ext uri="{FF2B5EF4-FFF2-40B4-BE49-F238E27FC236}">
-                <a16:creationId xmlns:a16="http://schemas.microsoft.com/office/drawing/2014/main" id="{0CA1E530-C213-4EEB-AA36-4B986F4C5A83}"/>
+                <a16:creationId xmlns:a16="http://schemas.microsoft.com/office/drawing/2014/main" id="{85482BD1-ED67-4821-9C85-CC98721C659F}"/>
               </a:ext>
             </a:extLst>
           </p:cNvPr>
@@ -4276,7 +4306,7 @@
           <p:cNvPr id="2" name="">
             <a:extLst xmlns:a="http://schemas.openxmlformats.org/drawingml/2006/main">
               <a:ext uri="{FF2B5EF4-FFF2-40B4-BE49-F238E27FC236}">
-                <a16:creationId xmlns:a16="http://schemas.microsoft.com/office/drawing/2014/main" id="{190A3114-824D-4139-92B1-329D17D01415}"/>
+                <a16:creationId xmlns:a16="http://schemas.microsoft.com/office/drawing/2014/main" id="{EB664719-924F-486A-9F2A-8DBE639C5545}"/>
               </a:ext>
             </a:extLst>
           </p:cNvPr>
@@ -4333,7 +4363,7 @@
           <p:cNvPr id="3" name="">
             <a:extLst xmlns:a="http://schemas.openxmlformats.org/drawingml/2006/main">
               <a:ext uri="{FF2B5EF4-FFF2-40B4-BE49-F238E27FC236}">
-                <a16:creationId xmlns:a16="http://schemas.microsoft.com/office/drawing/2014/main" id="{E266DC75-5F28-4F16-8D29-61C2DD03A4B7}"/>
+                <a16:creationId xmlns:a16="http://schemas.microsoft.com/office/drawing/2014/main" id="{3EC1419D-95BD-4934-B15C-99DC8836AB86}"/>
               </a:ext>
             </a:extLst>
           </p:cNvPr>
@@ -4390,7 +4420,7 @@
           <p:cNvPr id="4" name="">
             <a:extLst xmlns:a="http://schemas.openxmlformats.org/drawingml/2006/main">
               <a:ext uri="{FF2B5EF4-FFF2-40B4-BE49-F238E27FC236}">
-                <a16:creationId xmlns:a16="http://schemas.microsoft.com/office/drawing/2014/main" id="{6C299BD7-D822-429D-8F37-22BF4BE60E77}"/>
+                <a16:creationId xmlns:a16="http://schemas.microsoft.com/office/drawing/2014/main" id="{28816B50-AC8C-4951-8AA3-6BE161FD95C3}"/>
               </a:ext>
             </a:extLst>
           </p:cNvPr>
@@ -4447,7 +4477,7 @@
           <p:cNvPr id="5" name="">
             <a:extLst xmlns:a="http://schemas.openxmlformats.org/drawingml/2006/main">
               <a:ext uri="{FF2B5EF4-FFF2-40B4-BE49-F238E27FC236}">
-                <a16:creationId xmlns:a16="http://schemas.microsoft.com/office/drawing/2014/main" id="{F3077ED1-773C-4690-B1BF-FD7FB60EDBEE}"/>
+                <a16:creationId xmlns:a16="http://schemas.microsoft.com/office/drawing/2014/main" id="{10C6FA29-315B-4B08-98CC-D3D3999E00D9}"/>
               </a:ext>
             </a:extLst>
           </p:cNvPr>
@@ -4504,7 +4534,7 @@
           <p:cNvPr id="6" name="">
             <a:extLst xmlns:a="http://schemas.openxmlformats.org/drawingml/2006/main">
               <a:ext uri="{FF2B5EF4-FFF2-40B4-BE49-F238E27FC236}">
-                <a16:creationId xmlns:a16="http://schemas.microsoft.com/office/drawing/2014/main" id="{530382C4-8B7E-415B-BC8F-3C7E3A3E873B}"/>
+                <a16:creationId xmlns:a16="http://schemas.microsoft.com/office/drawing/2014/main" id="{E7688584-2725-42EC-9BE6-2883432C6FCF}"/>
               </a:ext>
             </a:extLst>
           </p:cNvPr>
@@ -4561,7 +4591,7 @@
           <p:cNvPr id="7" name="">
             <a:extLst xmlns:a="http://schemas.openxmlformats.org/drawingml/2006/main">
               <a:ext uri="{FF2B5EF4-FFF2-40B4-BE49-F238E27FC236}">
-                <a16:creationId xmlns:a16="http://schemas.microsoft.com/office/drawing/2014/main" id="{B533F123-51D1-4AF1-8E65-264007B0B8D0}"/>
+                <a16:creationId xmlns:a16="http://schemas.microsoft.com/office/drawing/2014/main" id="{2838523E-ABD4-40E9-A2E6-BD88337262E1}"/>
               </a:ext>
             </a:extLst>
           </p:cNvPr>
@@ -4618,7 +4648,7 @@
           <p:cNvPr id="8" name="">
             <a:extLst xmlns:a="http://schemas.openxmlformats.org/drawingml/2006/main">
               <a:ext uri="{FF2B5EF4-FFF2-40B4-BE49-F238E27FC236}">
-                <a16:creationId xmlns:a16="http://schemas.microsoft.com/office/drawing/2014/main" id="{4FA30985-FEFC-47E2-A1B7-B488579447B8}"/>
+                <a16:creationId xmlns:a16="http://schemas.microsoft.com/office/drawing/2014/main" id="{945ADB82-5056-4CE0-AE3A-90655D9135D4}"/>
               </a:ext>
             </a:extLst>
           </p:cNvPr>
@@ -4675,7 +4705,7 @@
           <p:cNvPr id="9" name="">
             <a:extLst xmlns:a="http://schemas.openxmlformats.org/drawingml/2006/main">
               <a:ext uri="{FF2B5EF4-FFF2-40B4-BE49-F238E27FC236}">
-                <a16:creationId xmlns:a16="http://schemas.microsoft.com/office/drawing/2014/main" id="{A4C78D1C-2892-40DF-A7DC-344B307AB750}"/>
+                <a16:creationId xmlns:a16="http://schemas.microsoft.com/office/drawing/2014/main" id="{5E5B8951-84F4-4762-86B0-923EAD28B14F}"/>
               </a:ext>
             </a:extLst>
           </p:cNvPr>
@@ -4722,7 +4752,7 @@
                 <a:ea typeface="Arial"/>
                 <a:cs typeface="Arial"/>
               </a:rPr>
-              <a:t>9. September 2026     12 / 16</a:t>
+              <a:t>11. September 2026     12 / 16</a:t>
             </a:r>
           </a:p>
         </p:txBody>
@@ -4730,7 +4760,7 @@
     </p:spTree>
     <p:extLst>
       <p:ext uri="{BB962C8B-B14F-4D97-AF65-F5344CB8AC3E}">
-        <p14:creationId xmlns:p14="http://schemas.microsoft.com/office/powerpoint/2010/main" val="1042538332"/>
+        <p14:creationId xmlns:p14="http://schemas.microsoft.com/office/powerpoint/2010/main" val="2068592402"/>
       </p:ext>
     </p:extLst>
   </p:cSld>
@@ -4761,7 +4791,7 @@
           <p:cNvPr id="5" name="">
             <a:extLst xmlns:a="http://schemas.openxmlformats.org/drawingml/2006/main">
               <a:ext uri="{FF2B5EF4-FFF2-40B4-BE49-F238E27FC236}">
-                <a16:creationId xmlns:a16="http://schemas.microsoft.com/office/drawing/2014/main" id="{153DF1EA-F6CD-470F-9CFB-12F9EC742593}"/>
+                <a16:creationId xmlns:a16="http://schemas.microsoft.com/office/drawing/2014/main" id="{4B041E4C-1956-4723-9070-E95F34A508F9}"/>
               </a:ext>
             </a:extLst>
           </p:cNvPr>
@@ -4818,7 +4848,7 @@
           <p:cNvPr id="2" name="">
             <a:extLst xmlns:a="http://schemas.openxmlformats.org/drawingml/2006/main">
               <a:ext uri="{FF2B5EF4-FFF2-40B4-BE49-F238E27FC236}">
-                <a16:creationId xmlns:a16="http://schemas.microsoft.com/office/drawing/2014/main" id="{503C797B-F1B6-45A4-A489-548CD58E70C0}"/>
+                <a16:creationId xmlns:a16="http://schemas.microsoft.com/office/drawing/2014/main" id="{F0D2392E-9981-4C27-A082-923A32EA3A51}"/>
               </a:ext>
             </a:extLst>
           </p:cNvPr>
@@ -5113,7 +5143,7 @@
           <p:cNvPr id="4" name="">
             <a:extLst xmlns:a="http://schemas.openxmlformats.org/drawingml/2006/main">
               <a:ext uri="{FF2B5EF4-FFF2-40B4-BE49-F238E27FC236}">
-                <a16:creationId xmlns:a16="http://schemas.microsoft.com/office/drawing/2014/main" id="{07D02609-7CA6-498C-BC13-F58A37116709}"/>
+                <a16:creationId xmlns:a16="http://schemas.microsoft.com/office/drawing/2014/main" id="{8E9C1E95-ADD0-4C23-8801-A2E9623D4362}"/>
               </a:ext>
             </a:extLst>
           </p:cNvPr>
@@ -5160,7 +5190,7 @@
                 <a:ea typeface="Arial"/>
                 <a:cs typeface="Arial"/>
               </a:rPr>
-              <a:t>9. September 2026     13 / 16</a:t>
+              <a:t>11. September 2026     13 / 16</a:t>
             </a:r>
           </a:p>
         </p:txBody>
@@ -5168,7 +5198,7 @@
     </p:spTree>
     <p:extLst>
       <p:ext uri="{BB962C8B-B14F-4D97-AF65-F5344CB8AC3E}">
-        <p14:creationId xmlns:p14="http://schemas.microsoft.com/office/powerpoint/2010/main" val="186841543"/>
+        <p14:creationId xmlns:p14="http://schemas.microsoft.com/office/powerpoint/2010/main" val="472396653"/>
       </p:ext>
     </p:extLst>
   </p:cSld>
@@ -5199,7 +5229,7 @@
           <p:cNvPr id="8" name="">
             <a:extLst xmlns:a="http://schemas.openxmlformats.org/drawingml/2006/main">
               <a:ext uri="{FF2B5EF4-FFF2-40B4-BE49-F238E27FC236}">
-                <a16:creationId xmlns:a16="http://schemas.microsoft.com/office/drawing/2014/main" id="{9D7A5846-DA50-4DC0-B6BF-920DA03C5D35}"/>
+                <a16:creationId xmlns:a16="http://schemas.microsoft.com/office/drawing/2014/main" id="{EDCC6EF0-E9D3-4823-87D2-225F3F2D0D0C}"/>
               </a:ext>
             </a:extLst>
           </p:cNvPr>
@@ -5256,7 +5286,7 @@
           <p:cNvPr id="2" name="">
             <a:extLst xmlns:a="http://schemas.openxmlformats.org/drawingml/2006/main">
               <a:ext uri="{FF2B5EF4-FFF2-40B4-BE49-F238E27FC236}">
-                <a16:creationId xmlns:a16="http://schemas.microsoft.com/office/drawing/2014/main" id="{0EA3164A-4598-4FBA-9B5F-094ED84C041E}"/>
+                <a16:creationId xmlns:a16="http://schemas.microsoft.com/office/drawing/2014/main" id="{129E60BD-D6D5-4BD8-8C71-19559ACD5F71}"/>
               </a:ext>
             </a:extLst>
           </p:cNvPr>
@@ -5313,7 +5343,7 @@
           <p:cNvPr id="3" name="">
             <a:extLst xmlns:a="http://schemas.openxmlformats.org/drawingml/2006/main">
               <a:ext uri="{FF2B5EF4-FFF2-40B4-BE49-F238E27FC236}">
-                <a16:creationId xmlns:a16="http://schemas.microsoft.com/office/drawing/2014/main" id="{F6E7AED0-F736-459C-85E2-E74DD6CAE224}"/>
+                <a16:creationId xmlns:a16="http://schemas.microsoft.com/office/drawing/2014/main" id="{E06FD8BE-B97A-438E-9B94-FF93D1D9934D}"/>
               </a:ext>
             </a:extLst>
           </p:cNvPr>
@@ -5370,7 +5400,7 @@
           <p:cNvPr id="4" name="">
             <a:extLst xmlns:a="http://schemas.openxmlformats.org/drawingml/2006/main">
               <a:ext uri="{FF2B5EF4-FFF2-40B4-BE49-F238E27FC236}">
-                <a16:creationId xmlns:a16="http://schemas.microsoft.com/office/drawing/2014/main" id="{44A5CB5B-22A7-4689-A0FF-EBE47FB802E6}"/>
+                <a16:creationId xmlns:a16="http://schemas.microsoft.com/office/drawing/2014/main" id="{5A87B410-F44E-4879-8DE0-C6E49F35ACC8}"/>
               </a:ext>
             </a:extLst>
           </p:cNvPr>
@@ -5450,7 +5480,7 @@
           <p:cNvPr id="5" name="">
             <a:extLst xmlns:a="http://schemas.openxmlformats.org/drawingml/2006/main">
               <a:ext uri="{FF2B5EF4-FFF2-40B4-BE49-F238E27FC236}">
-                <a16:creationId xmlns:a16="http://schemas.microsoft.com/office/drawing/2014/main" id="{7366DCF7-F456-42DE-AE31-0C263AA660E7}"/>
+                <a16:creationId xmlns:a16="http://schemas.microsoft.com/office/drawing/2014/main" id="{A9A38EEB-84A5-46A8-840D-FD975B533109}"/>
               </a:ext>
             </a:extLst>
           </p:cNvPr>
@@ -5507,7 +5537,7 @@
           <p:cNvPr id="6" name="">
             <a:extLst xmlns:a="http://schemas.openxmlformats.org/drawingml/2006/main">
               <a:ext uri="{FF2B5EF4-FFF2-40B4-BE49-F238E27FC236}">
-                <a16:creationId xmlns:a16="http://schemas.microsoft.com/office/drawing/2014/main" id="{FE897A92-0A66-47D3-B764-50D186B99147}"/>
+                <a16:creationId xmlns:a16="http://schemas.microsoft.com/office/drawing/2014/main" id="{BF8DBE61-7D36-40B8-92C4-00CD2FE1ACC2}"/>
               </a:ext>
             </a:extLst>
           </p:cNvPr>
@@ -5587,7 +5617,7 @@
           <p:cNvPr id="7" name="">
             <a:extLst xmlns:a="http://schemas.openxmlformats.org/drawingml/2006/main">
               <a:ext uri="{FF2B5EF4-FFF2-40B4-BE49-F238E27FC236}">
-                <a16:creationId xmlns:a16="http://schemas.microsoft.com/office/drawing/2014/main" id="{E327F3B4-8519-46A5-B70C-50F883C90E40}"/>
+                <a16:creationId xmlns:a16="http://schemas.microsoft.com/office/drawing/2014/main" id="{3F0699B2-A2D9-4B6A-97C9-54F6CFA0ABA7}"/>
               </a:ext>
             </a:extLst>
           </p:cNvPr>
@@ -5634,7 +5664,7 @@
                 <a:ea typeface="Arial"/>
                 <a:cs typeface="Arial"/>
               </a:rPr>
-              <a:t>9. September 2026     14 / 16</a:t>
+              <a:t>11. September 2026     14 / 16</a:t>
             </a:r>
           </a:p>
         </p:txBody>
@@ -5642,7 +5672,7 @@
     </p:spTree>
     <p:extLst>
       <p:ext uri="{BB962C8B-B14F-4D97-AF65-F5344CB8AC3E}">
-        <p14:creationId xmlns:p14="http://schemas.microsoft.com/office/powerpoint/2010/main" val="1131473900"/>
+        <p14:creationId xmlns:p14="http://schemas.microsoft.com/office/powerpoint/2010/main" val="312504043"/>
       </p:ext>
     </p:extLst>
   </p:cSld>
@@ -5673,7 +5703,7 @@
           <p:cNvPr id="10" name="">
             <a:extLst xmlns:a="http://schemas.openxmlformats.org/drawingml/2006/main">
               <a:ext uri="{FF2B5EF4-FFF2-40B4-BE49-F238E27FC236}">
-                <a16:creationId xmlns:a16="http://schemas.microsoft.com/office/drawing/2014/main" id="{A09FE5BD-193E-4FDF-9228-BD6A27638EDC}"/>
+                <a16:creationId xmlns:a16="http://schemas.microsoft.com/office/drawing/2014/main" id="{1CDE52CD-8B6D-4DE6-A9EC-746A7E662F96}"/>
               </a:ext>
             </a:extLst>
           </p:cNvPr>
@@ -5730,7 +5760,7 @@
           <p:cNvPr id="2" name="">
             <a:extLst xmlns:a="http://schemas.openxmlformats.org/drawingml/2006/main">
               <a:ext uri="{FF2B5EF4-FFF2-40B4-BE49-F238E27FC236}">
-                <a16:creationId xmlns:a16="http://schemas.microsoft.com/office/drawing/2014/main" id="{609B00D6-4C0A-4E7A-82E8-79A4EE6E9100}"/>
+                <a16:creationId xmlns:a16="http://schemas.microsoft.com/office/drawing/2014/main" id="{4A9C068A-B260-4DC7-A489-DE7FD9280A93}"/>
               </a:ext>
             </a:extLst>
           </p:cNvPr>
@@ -5787,7 +5817,7 @@
           <p:cNvPr id="3" name="">
             <a:extLst xmlns:a="http://schemas.openxmlformats.org/drawingml/2006/main">
               <a:ext uri="{FF2B5EF4-FFF2-40B4-BE49-F238E27FC236}">
-                <a16:creationId xmlns:a16="http://schemas.microsoft.com/office/drawing/2014/main" id="{F21F4A9F-390C-42A0-A720-EAEA03B6040E}"/>
+                <a16:creationId xmlns:a16="http://schemas.microsoft.com/office/drawing/2014/main" id="{EDC3E729-B2E2-4E43-BEA8-CA537E97E83B}"/>
               </a:ext>
             </a:extLst>
           </p:cNvPr>
@@ -5844,7 +5874,7 @@
           <p:cNvPr id="4" name="">
             <a:extLst xmlns:a="http://schemas.openxmlformats.org/drawingml/2006/main">
               <a:ext uri="{FF2B5EF4-FFF2-40B4-BE49-F238E27FC236}">
-                <a16:creationId xmlns:a16="http://schemas.microsoft.com/office/drawing/2014/main" id="{61AA62C2-46EC-4B6A-B73F-767DFEB33AC6}"/>
+                <a16:creationId xmlns:a16="http://schemas.microsoft.com/office/drawing/2014/main" id="{8F3E8B3A-CBAA-4B41-8B2D-7CCF05063CFD}"/>
               </a:ext>
             </a:extLst>
           </p:cNvPr>
@@ -5901,7 +5931,7 @@
           <p:cNvPr id="5" name="">
             <a:extLst xmlns:a="http://schemas.openxmlformats.org/drawingml/2006/main">
               <a:ext uri="{FF2B5EF4-FFF2-40B4-BE49-F238E27FC236}">
-                <a16:creationId xmlns:a16="http://schemas.microsoft.com/office/drawing/2014/main" id="{B3E673DA-88C9-43DD-8E6E-97C9BDE2C295}"/>
+                <a16:creationId xmlns:a16="http://schemas.microsoft.com/office/drawing/2014/main" id="{B2366A6E-7870-4661-9F05-E52049EE488D}"/>
               </a:ext>
             </a:extLst>
           </p:cNvPr>
@@ -5958,7 +5988,7 @@
           <p:cNvPr id="6" name="">
             <a:extLst xmlns:a="http://schemas.openxmlformats.org/drawingml/2006/main">
               <a:ext uri="{FF2B5EF4-FFF2-40B4-BE49-F238E27FC236}">
-                <a16:creationId xmlns:a16="http://schemas.microsoft.com/office/drawing/2014/main" id="{38B8AA75-36C2-4FDE-B1EC-D2C30B9C4212}"/>
+                <a16:creationId xmlns:a16="http://schemas.microsoft.com/office/drawing/2014/main" id="{3D35278C-5464-4D79-811D-037D51537FE4}"/>
               </a:ext>
             </a:extLst>
           </p:cNvPr>
@@ -6015,7 +6045,7 @@
           <p:cNvPr id="7" name="">
             <a:extLst xmlns:a="http://schemas.openxmlformats.org/drawingml/2006/main">
               <a:ext uri="{FF2B5EF4-FFF2-40B4-BE49-F238E27FC236}">
-                <a16:creationId xmlns:a16="http://schemas.microsoft.com/office/drawing/2014/main" id="{E51DB64B-9E61-4A17-915E-7DBFA2976127}"/>
+                <a16:creationId xmlns:a16="http://schemas.microsoft.com/office/drawing/2014/main" id="{B12287C9-45D0-44F4-9056-D098704ABA64}"/>
               </a:ext>
             </a:extLst>
           </p:cNvPr>
@@ -6072,7 +6102,7 @@
           <p:cNvPr id="8" name="">
             <a:extLst xmlns:a="http://schemas.openxmlformats.org/drawingml/2006/main">
               <a:ext uri="{FF2B5EF4-FFF2-40B4-BE49-F238E27FC236}">
-                <a16:creationId xmlns:a16="http://schemas.microsoft.com/office/drawing/2014/main" id="{F5AE8681-3BA3-4255-8329-DC80C01022F0}"/>
+                <a16:creationId xmlns:a16="http://schemas.microsoft.com/office/drawing/2014/main" id="{E9383613-5E5F-4BFB-B233-AFBB5D1CCBA9}"/>
               </a:ext>
             </a:extLst>
           </p:cNvPr>
@@ -6129,7 +6159,7 @@
           <p:cNvPr id="9" name="">
             <a:extLst xmlns:a="http://schemas.openxmlformats.org/drawingml/2006/main">
               <a:ext uri="{FF2B5EF4-FFF2-40B4-BE49-F238E27FC236}">
-                <a16:creationId xmlns:a16="http://schemas.microsoft.com/office/drawing/2014/main" id="{7D7B882E-584C-4A17-976D-9E474279E063}"/>
+                <a16:creationId xmlns:a16="http://schemas.microsoft.com/office/drawing/2014/main" id="{91D00912-3912-46A5-AEBD-7587FC682C7E}"/>
               </a:ext>
             </a:extLst>
           </p:cNvPr>
@@ -6176,7 +6206,7 @@
                 <a:ea typeface="Arial"/>
                 <a:cs typeface="Arial"/>
               </a:rPr>
-              <a:t>9. September 2026     15 / 16</a:t>
+              <a:t>11. September 2026     15 / 16</a:t>
             </a:r>
           </a:p>
         </p:txBody>
@@ -6184,7 +6214,7 @@
     </p:spTree>
     <p:extLst>
       <p:ext uri="{BB962C8B-B14F-4D97-AF65-F5344CB8AC3E}">
-        <p14:creationId xmlns:p14="http://schemas.microsoft.com/office/powerpoint/2010/main" val="1260642566"/>
+        <p14:creationId xmlns:p14="http://schemas.microsoft.com/office/powerpoint/2010/main" val="803350850"/>
       </p:ext>
     </p:extLst>
   </p:cSld>
@@ -6215,7 +6245,7 @@
           <p:cNvPr id="10" name="">
             <a:extLst xmlns:a="http://schemas.openxmlformats.org/drawingml/2006/main">
               <a:ext uri="{FF2B5EF4-FFF2-40B4-BE49-F238E27FC236}">
-                <a16:creationId xmlns:a16="http://schemas.microsoft.com/office/drawing/2014/main" id="{BB2D5603-D1A2-4556-AE59-E6AE5727AD40}"/>
+                <a16:creationId xmlns:a16="http://schemas.microsoft.com/office/drawing/2014/main" id="{5B6AE5D3-2B08-4A81-8CA4-5B8E0F5ABD96}"/>
               </a:ext>
             </a:extLst>
           </p:cNvPr>
@@ -6272,7 +6302,7 @@
           <p:cNvPr id="2" name="">
             <a:extLst xmlns:a="http://schemas.openxmlformats.org/drawingml/2006/main">
               <a:ext uri="{FF2B5EF4-FFF2-40B4-BE49-F238E27FC236}">
-                <a16:creationId xmlns:a16="http://schemas.microsoft.com/office/drawing/2014/main" id="{AE9659D3-5F4F-4ECF-8AB4-37C00D6F806C}"/>
+                <a16:creationId xmlns:a16="http://schemas.microsoft.com/office/drawing/2014/main" id="{5311EA99-F2C6-4C83-92BE-3757A55DD5DB}"/>
               </a:ext>
             </a:extLst>
           </p:cNvPr>
@@ -6329,7 +6359,7 @@
           <p:cNvPr id="3" name="">
             <a:extLst xmlns:a="http://schemas.openxmlformats.org/drawingml/2006/main">
               <a:ext uri="{FF2B5EF4-FFF2-40B4-BE49-F238E27FC236}">
-                <a16:creationId xmlns:a16="http://schemas.microsoft.com/office/drawing/2014/main" id="{0D3F76FF-6657-43F1-A745-BDA497DB6F90}"/>
+                <a16:creationId xmlns:a16="http://schemas.microsoft.com/office/drawing/2014/main" id="{2584D2E8-859A-4B59-886B-18754C104525}"/>
               </a:ext>
             </a:extLst>
           </p:cNvPr>
@@ -6386,7 +6416,7 @@
           <p:cNvPr id="4" name="">
             <a:extLst xmlns:a="http://schemas.openxmlformats.org/drawingml/2006/main">
               <a:ext uri="{FF2B5EF4-FFF2-40B4-BE49-F238E27FC236}">
-                <a16:creationId xmlns:a16="http://schemas.microsoft.com/office/drawing/2014/main" id="{777E3F79-0B33-4BAB-BAE4-08767217B4BE}"/>
+                <a16:creationId xmlns:a16="http://schemas.microsoft.com/office/drawing/2014/main" id="{5EF86C87-8942-45B5-88EF-F407361F0C4A}"/>
               </a:ext>
             </a:extLst>
           </p:cNvPr>
@@ -6443,7 +6473,7 @@
           <p:cNvPr id="5" name="">
             <a:extLst xmlns:a="http://schemas.openxmlformats.org/drawingml/2006/main">
               <a:ext uri="{FF2B5EF4-FFF2-40B4-BE49-F238E27FC236}">
-                <a16:creationId xmlns:a16="http://schemas.microsoft.com/office/drawing/2014/main" id="{12AB86E4-3175-4172-922E-457EDEE18846}"/>
+                <a16:creationId xmlns:a16="http://schemas.microsoft.com/office/drawing/2014/main" id="{EB1CD62D-651C-43CC-984F-247846E4E335}"/>
               </a:ext>
             </a:extLst>
           </p:cNvPr>
@@ -6500,7 +6530,7 @@
           <p:cNvPr id="6" name="">
             <a:extLst xmlns:a="http://schemas.openxmlformats.org/drawingml/2006/main">
               <a:ext uri="{FF2B5EF4-FFF2-40B4-BE49-F238E27FC236}">
-                <a16:creationId xmlns:a16="http://schemas.microsoft.com/office/drawing/2014/main" id="{E5F12D4E-8CA3-4D83-9F02-42C57FF69ADF}"/>
+                <a16:creationId xmlns:a16="http://schemas.microsoft.com/office/drawing/2014/main" id="{BD2A8DD1-B035-46B1-8DD2-DB0266F72AEA}"/>
               </a:ext>
             </a:extLst>
           </p:cNvPr>
@@ -6557,7 +6587,7 @@
           <p:cNvPr id="7" name="">
             <a:extLst xmlns:a="http://schemas.openxmlformats.org/drawingml/2006/main">
               <a:ext uri="{FF2B5EF4-FFF2-40B4-BE49-F238E27FC236}">
-                <a16:creationId xmlns:a16="http://schemas.microsoft.com/office/drawing/2014/main" id="{C3EC57C9-12FD-4653-8823-42C1DFBF1629}"/>
+                <a16:creationId xmlns:a16="http://schemas.microsoft.com/office/drawing/2014/main" id="{143C8693-FA33-4A0D-B6B0-F0A08C067D09}"/>
               </a:ext>
             </a:extLst>
           </p:cNvPr>
@@ -6614,7 +6644,7 @@
           <p:cNvPr id="8" name="">
             <a:extLst xmlns:a="http://schemas.openxmlformats.org/drawingml/2006/main">
               <a:ext uri="{FF2B5EF4-FFF2-40B4-BE49-F238E27FC236}">
-                <a16:creationId xmlns:a16="http://schemas.microsoft.com/office/drawing/2014/main" id="{A2185CB6-115D-4982-BCC0-8EAC3BB5C05B}"/>
+                <a16:creationId xmlns:a16="http://schemas.microsoft.com/office/drawing/2014/main" id="{67137A9C-B373-403B-80FF-6F8D72FA6F5D}"/>
               </a:ext>
             </a:extLst>
           </p:cNvPr>
@@ -6671,7 +6701,7 @@
           <p:cNvPr id="9" name="">
             <a:extLst xmlns:a="http://schemas.openxmlformats.org/drawingml/2006/main">
               <a:ext uri="{FF2B5EF4-FFF2-40B4-BE49-F238E27FC236}">
-                <a16:creationId xmlns:a16="http://schemas.microsoft.com/office/drawing/2014/main" id="{DBCE03CC-19FC-41E0-BD6E-3F5B65336362}"/>
+                <a16:creationId xmlns:a16="http://schemas.microsoft.com/office/drawing/2014/main" id="{040FCC3D-D482-4E11-95EF-DB3A8DC5CD99}"/>
               </a:ext>
             </a:extLst>
           </p:cNvPr>
@@ -6718,7 +6748,7 @@
                 <a:ea typeface="Arial"/>
                 <a:cs typeface="Arial"/>
               </a:rPr>
-              <a:t>9. September 2026     16 / 16</a:t>
+              <a:t>11. September 2026     16 / 16</a:t>
             </a:r>
           </a:p>
         </p:txBody>
@@ -6726,7 +6756,7 @@
     </p:spTree>
     <p:extLst>
       <p:ext uri="{BB962C8B-B14F-4D97-AF65-F5344CB8AC3E}">
-        <p14:creationId xmlns:p14="http://schemas.microsoft.com/office/powerpoint/2010/main" val="2036136867"/>
+        <p14:creationId xmlns:p14="http://schemas.microsoft.com/office/powerpoint/2010/main" val="365455861"/>
       </p:ext>
     </p:extLst>
   </p:cSld>
@@ -6757,7 +6787,7 @@
           <p:cNvPr id="12" name="">
             <a:extLst xmlns:a="http://schemas.openxmlformats.org/drawingml/2006/main">
               <a:ext uri="{FF2B5EF4-FFF2-40B4-BE49-F238E27FC236}">
-                <a16:creationId xmlns:a16="http://schemas.microsoft.com/office/drawing/2014/main" id="{0BF372E4-3E9F-4839-8DDD-9BA0E873337B}"/>
+                <a16:creationId xmlns:a16="http://schemas.microsoft.com/office/drawing/2014/main" id="{07FA7F07-7261-40EF-88D0-E702B629DA88}"/>
               </a:ext>
             </a:extLst>
           </p:cNvPr>
@@ -6814,7 +6844,7 @@
           <p:cNvPr id="2" name="">
             <a:extLst xmlns:a="http://schemas.openxmlformats.org/drawingml/2006/main">
               <a:ext uri="{FF2B5EF4-FFF2-40B4-BE49-F238E27FC236}">
-                <a16:creationId xmlns:a16="http://schemas.microsoft.com/office/drawing/2014/main" id="{0C060F04-BA3A-4CE7-B0AD-F8354D51A8A1}"/>
+                <a16:creationId xmlns:a16="http://schemas.microsoft.com/office/drawing/2014/main" id="{19630927-6198-4539-A549-22E742753F52}"/>
               </a:ext>
             </a:extLst>
           </p:cNvPr>
@@ -6871,7 +6901,7 @@
           <p:cNvPr id="3" name="">
             <a:extLst xmlns:a="http://schemas.openxmlformats.org/drawingml/2006/main">
               <a:ext uri="{FF2B5EF4-FFF2-40B4-BE49-F238E27FC236}">
-                <a16:creationId xmlns:a16="http://schemas.microsoft.com/office/drawing/2014/main" id="{08B61F6E-B716-4001-A448-F7FB69CC5686}"/>
+                <a16:creationId xmlns:a16="http://schemas.microsoft.com/office/drawing/2014/main" id="{3CDF74F0-AC52-431C-9DB6-4AACBB55E2AA}"/>
               </a:ext>
             </a:extLst>
           </p:cNvPr>
@@ -6928,7 +6958,7 @@
           <p:cNvPr id="4" name="">
             <a:extLst xmlns:a="http://schemas.openxmlformats.org/drawingml/2006/main">
               <a:ext uri="{FF2B5EF4-FFF2-40B4-BE49-F238E27FC236}">
-                <a16:creationId xmlns:a16="http://schemas.microsoft.com/office/drawing/2014/main" id="{BFCCCECF-9EF3-4539-B9E1-2C2BC8A4B3C1}"/>
+                <a16:creationId xmlns:a16="http://schemas.microsoft.com/office/drawing/2014/main" id="{C9A0D556-7BF9-4CD6-8609-E131E4223B9F}"/>
               </a:ext>
             </a:extLst>
           </p:cNvPr>
@@ -6985,7 +7015,7 @@
           <p:cNvPr id="5" name="">
             <a:extLst xmlns:a="http://schemas.openxmlformats.org/drawingml/2006/main">
               <a:ext uri="{FF2B5EF4-FFF2-40B4-BE49-F238E27FC236}">
-                <a16:creationId xmlns:a16="http://schemas.microsoft.com/office/drawing/2014/main" id="{E9EAA019-8834-43BF-83CE-76324AD99163}"/>
+                <a16:creationId xmlns:a16="http://schemas.microsoft.com/office/drawing/2014/main" id="{B1B5D1CC-CE85-4F45-9A8D-53CDDC0C48B6}"/>
               </a:ext>
             </a:extLst>
           </p:cNvPr>
@@ -7042,7 +7072,7 @@
           <p:cNvPr id="6" name="">
             <a:extLst xmlns:a="http://schemas.openxmlformats.org/drawingml/2006/main">
               <a:ext uri="{FF2B5EF4-FFF2-40B4-BE49-F238E27FC236}">
-                <a16:creationId xmlns:a16="http://schemas.microsoft.com/office/drawing/2014/main" id="{E0A19FEF-D64D-4F3B-AE2C-418163EE73CB}"/>
+                <a16:creationId xmlns:a16="http://schemas.microsoft.com/office/drawing/2014/main" id="{5E003A03-C701-47AF-BDA1-23730CC0F0DF}"/>
               </a:ext>
             </a:extLst>
           </p:cNvPr>
@@ -7099,7 +7129,7 @@
           <p:cNvPr id="7" name="">
             <a:extLst xmlns:a="http://schemas.openxmlformats.org/drawingml/2006/main">
               <a:ext uri="{FF2B5EF4-FFF2-40B4-BE49-F238E27FC236}">
-                <a16:creationId xmlns:a16="http://schemas.microsoft.com/office/drawing/2014/main" id="{38AFF5D9-9F53-4764-8A49-FD651DB15222}"/>
+                <a16:creationId xmlns:a16="http://schemas.microsoft.com/office/drawing/2014/main" id="{65118492-FF2E-4108-B156-A269CA15FBA8}"/>
               </a:ext>
             </a:extLst>
           </p:cNvPr>
@@ -7156,7 +7186,7 @@
           <p:cNvPr id="8" name="">
             <a:extLst xmlns:a="http://schemas.openxmlformats.org/drawingml/2006/main">
               <a:ext uri="{FF2B5EF4-FFF2-40B4-BE49-F238E27FC236}">
-                <a16:creationId xmlns:a16="http://schemas.microsoft.com/office/drawing/2014/main" id="{12557FC3-455B-459C-A6C9-4EA7786C1747}"/>
+                <a16:creationId xmlns:a16="http://schemas.microsoft.com/office/drawing/2014/main" id="{6E3F45ED-685E-4BB8-89ED-9513A40A81B8}"/>
               </a:ext>
             </a:extLst>
           </p:cNvPr>
@@ -7213,7 +7243,7 @@
           <p:cNvPr id="9" name="">
             <a:extLst xmlns:a="http://schemas.openxmlformats.org/drawingml/2006/main">
               <a:ext uri="{FF2B5EF4-FFF2-40B4-BE49-F238E27FC236}">
-                <a16:creationId xmlns:a16="http://schemas.microsoft.com/office/drawing/2014/main" id="{0AB903AC-DBA9-470D-BAD9-306F996EC4CF}"/>
+                <a16:creationId xmlns:a16="http://schemas.microsoft.com/office/drawing/2014/main" id="{97B1BCDE-4CA6-43E3-A069-7B91B1F95C9A}"/>
               </a:ext>
             </a:extLst>
           </p:cNvPr>
@@ -7270,7 +7300,7 @@
           <p:cNvPr id="10" name="">
             <a:extLst xmlns:a="http://schemas.openxmlformats.org/drawingml/2006/main">
               <a:ext uri="{FF2B5EF4-FFF2-40B4-BE49-F238E27FC236}">
-                <a16:creationId xmlns:a16="http://schemas.microsoft.com/office/drawing/2014/main" id="{D2B7A431-B2C5-4EA0-98FA-9AFC929B2D76}"/>
+                <a16:creationId xmlns:a16="http://schemas.microsoft.com/office/drawing/2014/main" id="{B9F1FC6A-B114-4E85-B853-F88CD744DC49}"/>
               </a:ext>
             </a:extLst>
           </p:cNvPr>
@@ -7327,7 +7357,7 @@
           <p:cNvPr id="11" name="">
             <a:extLst xmlns:a="http://schemas.openxmlformats.org/drawingml/2006/main">
               <a:ext uri="{FF2B5EF4-FFF2-40B4-BE49-F238E27FC236}">
-                <a16:creationId xmlns:a16="http://schemas.microsoft.com/office/drawing/2014/main" id="{EBDAFA14-4CC6-4C25-A9E2-70A42DF71C84}"/>
+                <a16:creationId xmlns:a16="http://schemas.microsoft.com/office/drawing/2014/main" id="{F592B2AC-8983-4D2D-AA25-7A3EB7CC465C}"/>
               </a:ext>
             </a:extLst>
           </p:cNvPr>
@@ -7374,7 +7404,7 @@
                 <a:ea typeface="Arial"/>
                 <a:cs typeface="Arial"/>
               </a:rPr>
-              <a:t>9. September 2026     2 / 16</a:t>
+              <a:t>11. September 2026     2 / 16</a:t>
             </a:r>
           </a:p>
         </p:txBody>
@@ -7382,7 +7412,7 @@
     </p:spTree>
     <p:extLst>
       <p:ext uri="{BB962C8B-B14F-4D97-AF65-F5344CB8AC3E}">
-        <p14:creationId xmlns:p14="http://schemas.microsoft.com/office/powerpoint/2010/main" val="1035664558"/>
+        <p14:creationId xmlns:p14="http://schemas.microsoft.com/office/powerpoint/2010/main" val="1418814694"/>
       </p:ext>
     </p:extLst>
   </p:cSld>
@@ -7413,7 +7443,7 @@
           <p:cNvPr id="8" name="">
             <a:extLst xmlns:a="http://schemas.openxmlformats.org/drawingml/2006/main">
               <a:ext uri="{FF2B5EF4-FFF2-40B4-BE49-F238E27FC236}">
-                <a16:creationId xmlns:a16="http://schemas.microsoft.com/office/drawing/2014/main" id="{39A0C860-F560-4142-891F-547B2601D437}"/>
+                <a16:creationId xmlns:a16="http://schemas.microsoft.com/office/drawing/2014/main" id="{0BE79110-D54E-47C7-8A59-770E29720DB5}"/>
               </a:ext>
             </a:extLst>
           </p:cNvPr>
@@ -7470,7 +7500,7 @@
           <p:cNvPr id="2" name="">
             <a:extLst xmlns:a="http://schemas.openxmlformats.org/drawingml/2006/main">
               <a:ext uri="{FF2B5EF4-FFF2-40B4-BE49-F238E27FC236}">
-                <a16:creationId xmlns:a16="http://schemas.microsoft.com/office/drawing/2014/main" id="{7D788D4E-FC2D-4426-BA56-56F36DBE7E84}"/>
+                <a16:creationId xmlns:a16="http://schemas.microsoft.com/office/drawing/2014/main" id="{F3E11BE7-641D-49BA-A280-6D68D8CD96BA}"/>
               </a:ext>
             </a:extLst>
           </p:cNvPr>
@@ -7527,7 +7557,7 @@
           <p:cNvPr id="3" name="">
             <a:extLst xmlns:a="http://schemas.openxmlformats.org/drawingml/2006/main">
               <a:ext uri="{FF2B5EF4-FFF2-40B4-BE49-F238E27FC236}">
-                <a16:creationId xmlns:a16="http://schemas.microsoft.com/office/drawing/2014/main" id="{CD3C24B7-E365-4707-88E3-CC693D90A6AD}"/>
+                <a16:creationId xmlns:a16="http://schemas.microsoft.com/office/drawing/2014/main" id="{628821A1-5C83-43E4-9410-670A828DAFA9}"/>
               </a:ext>
             </a:extLst>
           </p:cNvPr>
@@ -7584,7 +7614,7 @@
           <p:cNvPr id="4" name="">
             <a:extLst xmlns:a="http://schemas.openxmlformats.org/drawingml/2006/main">
               <a:ext uri="{FF2B5EF4-FFF2-40B4-BE49-F238E27FC236}">
-                <a16:creationId xmlns:a16="http://schemas.microsoft.com/office/drawing/2014/main" id="{C733FF18-7DFF-4A88-964D-EF7E12CE1B77}"/>
+                <a16:creationId xmlns:a16="http://schemas.microsoft.com/office/drawing/2014/main" id="{C481D137-C295-4128-9A75-AEDA2F867FBD}"/>
               </a:ext>
             </a:extLst>
           </p:cNvPr>
@@ -7687,7 +7717,7 @@
           <p:cNvPr id="5" name="">
             <a:extLst xmlns:a="http://schemas.openxmlformats.org/drawingml/2006/main">
               <a:ext uri="{FF2B5EF4-FFF2-40B4-BE49-F238E27FC236}">
-                <a16:creationId xmlns:a16="http://schemas.microsoft.com/office/drawing/2014/main" id="{C0641319-3228-4429-AFF9-D29F35F962E7}"/>
+                <a16:creationId xmlns:a16="http://schemas.microsoft.com/office/drawing/2014/main" id="{7462F4DF-83FD-4697-94BC-56486CF25760}"/>
               </a:ext>
             </a:extLst>
           </p:cNvPr>
@@ -7744,7 +7774,7 @@
           <p:cNvPr id="6" name="">
             <a:extLst xmlns:a="http://schemas.openxmlformats.org/drawingml/2006/main">
               <a:ext uri="{FF2B5EF4-FFF2-40B4-BE49-F238E27FC236}">
-                <a16:creationId xmlns:a16="http://schemas.microsoft.com/office/drawing/2014/main" id="{E9BEDA09-5FA0-42EB-8606-D8C2601D5D4E}"/>
+                <a16:creationId xmlns:a16="http://schemas.microsoft.com/office/drawing/2014/main" id="{27E2EB86-2697-4CF6-AF05-D496C1E067FA}"/>
               </a:ext>
             </a:extLst>
           </p:cNvPr>
@@ -7847,7 +7877,7 @@
           <p:cNvPr id="7" name="">
             <a:extLst xmlns:a="http://schemas.openxmlformats.org/drawingml/2006/main">
               <a:ext uri="{FF2B5EF4-FFF2-40B4-BE49-F238E27FC236}">
-                <a16:creationId xmlns:a16="http://schemas.microsoft.com/office/drawing/2014/main" id="{5547AB23-34BF-45CB-97C8-477ADA9E095A}"/>
+                <a16:creationId xmlns:a16="http://schemas.microsoft.com/office/drawing/2014/main" id="{3B6F08B1-95CB-43C8-940C-B44272F649FF}"/>
               </a:ext>
             </a:extLst>
           </p:cNvPr>
@@ -7894,7 +7924,7 @@
                 <a:ea typeface="Arial"/>
                 <a:cs typeface="Arial"/>
               </a:rPr>
-              <a:t>9. September 2026     3 / 16</a:t>
+              <a:t>11. September 2026     3 / 16</a:t>
             </a:r>
           </a:p>
         </p:txBody>
@@ -7902,7 +7932,7 @@
     </p:spTree>
     <p:extLst>
       <p:ext uri="{BB962C8B-B14F-4D97-AF65-F5344CB8AC3E}">
-        <p14:creationId xmlns:p14="http://schemas.microsoft.com/office/powerpoint/2010/main" val="1693576735"/>
+        <p14:creationId xmlns:p14="http://schemas.microsoft.com/office/powerpoint/2010/main" val="1448959186"/>
       </p:ext>
     </p:extLst>
   </p:cSld>
@@ -7933,7 +7963,7 @@
           <p:cNvPr id="5" name="">
             <a:extLst xmlns:a="http://schemas.openxmlformats.org/drawingml/2006/main">
               <a:ext uri="{FF2B5EF4-FFF2-40B4-BE49-F238E27FC236}">
-                <a16:creationId xmlns:a16="http://schemas.microsoft.com/office/drawing/2014/main" id="{8D63EB1C-B2C3-43A6-B506-033A7FFCAA78}"/>
+                <a16:creationId xmlns:a16="http://schemas.microsoft.com/office/drawing/2014/main" id="{0384EDD6-5AF0-4C75-B277-3EE50B5BAC8A}"/>
               </a:ext>
             </a:extLst>
           </p:cNvPr>
@@ -7990,7 +8020,7 @@
           <p:cNvPr id="2" name="">
             <a:extLst xmlns:a="http://schemas.openxmlformats.org/drawingml/2006/main">
               <a:ext uri="{FF2B5EF4-FFF2-40B4-BE49-F238E27FC236}">
-                <a16:creationId xmlns:a16="http://schemas.microsoft.com/office/drawing/2014/main" id="{703858FE-DB9D-444B-8A33-DEABD7B9CC21}"/>
+                <a16:creationId xmlns:a16="http://schemas.microsoft.com/office/drawing/2014/main" id="{00E7E7A9-4E16-435A-897A-4B6E2343D00E}"/>
               </a:ext>
             </a:extLst>
           </p:cNvPr>
@@ -8393,7 +8423,7 @@
           <p:cNvPr id="4" name="">
             <a:extLst xmlns:a="http://schemas.openxmlformats.org/drawingml/2006/main">
               <a:ext uri="{FF2B5EF4-FFF2-40B4-BE49-F238E27FC236}">
-                <a16:creationId xmlns:a16="http://schemas.microsoft.com/office/drawing/2014/main" id="{BD035DD1-7B1B-4F49-AE4B-24F102FA38E7}"/>
+                <a16:creationId xmlns:a16="http://schemas.microsoft.com/office/drawing/2014/main" id="{C231923C-0327-4F39-B46F-3DCE8CFA3A99}"/>
               </a:ext>
             </a:extLst>
           </p:cNvPr>
@@ -8440,7 +8470,7 @@
                 <a:ea typeface="Arial"/>
                 <a:cs typeface="Arial"/>
               </a:rPr>
-              <a:t>9. September 2026     4 / 16</a:t>
+              <a:t>11. September 2026     4 / 16</a:t>
             </a:r>
           </a:p>
         </p:txBody>
@@ -8448,7 +8478,7 @@
     </p:spTree>
     <p:extLst>
       <p:ext uri="{BB962C8B-B14F-4D97-AF65-F5344CB8AC3E}">
-        <p14:creationId xmlns:p14="http://schemas.microsoft.com/office/powerpoint/2010/main" val="1946145876"/>
+        <p14:creationId xmlns:p14="http://schemas.microsoft.com/office/powerpoint/2010/main" val="2116173048"/>
       </p:ext>
     </p:extLst>
   </p:cSld>
@@ -8479,7 +8509,7 @@
           <p:cNvPr id="12" name="">
             <a:extLst xmlns:a="http://schemas.openxmlformats.org/drawingml/2006/main">
               <a:ext uri="{FF2B5EF4-FFF2-40B4-BE49-F238E27FC236}">
-                <a16:creationId xmlns:a16="http://schemas.microsoft.com/office/drawing/2014/main" id="{DC00DA4D-5266-421B-9613-8CA58DDA1882}"/>
+                <a16:creationId xmlns:a16="http://schemas.microsoft.com/office/drawing/2014/main" id="{C3C226D5-5571-4FB2-BE62-A46E16675B9F}"/>
               </a:ext>
             </a:extLst>
           </p:cNvPr>
@@ -8536,7 +8566,7 @@
           <p:cNvPr id="2" name="">
             <a:extLst xmlns:a="http://schemas.openxmlformats.org/drawingml/2006/main">
               <a:ext uri="{FF2B5EF4-FFF2-40B4-BE49-F238E27FC236}">
-                <a16:creationId xmlns:a16="http://schemas.microsoft.com/office/drawing/2014/main" id="{78267303-28DE-4668-BE16-4CD8551CAABF}"/>
+                <a16:creationId xmlns:a16="http://schemas.microsoft.com/office/drawing/2014/main" id="{49B8FD6E-13B9-4DB1-8587-E68CA8AECF45}"/>
               </a:ext>
             </a:extLst>
           </p:cNvPr>
@@ -8593,7 +8623,7 @@
           <p:cNvPr id="3" name="">
             <a:extLst xmlns:a="http://schemas.openxmlformats.org/drawingml/2006/main">
               <a:ext uri="{FF2B5EF4-FFF2-40B4-BE49-F238E27FC236}">
-                <a16:creationId xmlns:a16="http://schemas.microsoft.com/office/drawing/2014/main" id="{BB3719BE-A375-4B2A-9A69-6935FCF160D3}"/>
+                <a16:creationId xmlns:a16="http://schemas.microsoft.com/office/drawing/2014/main" id="{2A67DC04-2904-41BB-92F0-FD8354BA20C5}"/>
               </a:ext>
             </a:extLst>
           </p:cNvPr>
@@ -8650,7 +8680,7 @@
           <p:cNvPr id="4" name="">
             <a:extLst xmlns:a="http://schemas.openxmlformats.org/drawingml/2006/main">
               <a:ext uri="{FF2B5EF4-FFF2-40B4-BE49-F238E27FC236}">
-                <a16:creationId xmlns:a16="http://schemas.microsoft.com/office/drawing/2014/main" id="{175AEC38-64F9-4B87-92A1-6F630D3FFAE9}"/>
+                <a16:creationId xmlns:a16="http://schemas.microsoft.com/office/drawing/2014/main" id="{DC45E6FD-55FB-416F-BFBE-27DBF04D6C32}"/>
               </a:ext>
             </a:extLst>
           </p:cNvPr>
@@ -8707,7 +8737,7 @@
           <p:cNvPr id="5" name="">
             <a:extLst xmlns:a="http://schemas.openxmlformats.org/drawingml/2006/main">
               <a:ext uri="{FF2B5EF4-FFF2-40B4-BE49-F238E27FC236}">
-                <a16:creationId xmlns:a16="http://schemas.microsoft.com/office/drawing/2014/main" id="{F8718541-1D1F-43C8-A003-2973B49946D8}"/>
+                <a16:creationId xmlns:a16="http://schemas.microsoft.com/office/drawing/2014/main" id="{5D0D036A-3724-4559-9A0A-911817758197}"/>
               </a:ext>
             </a:extLst>
           </p:cNvPr>
@@ -8764,7 +8794,7 @@
           <p:cNvPr id="6" name="">
             <a:extLst xmlns:a="http://schemas.openxmlformats.org/drawingml/2006/main">
               <a:ext uri="{FF2B5EF4-FFF2-40B4-BE49-F238E27FC236}">
-                <a16:creationId xmlns:a16="http://schemas.microsoft.com/office/drawing/2014/main" id="{89E4EC83-42E2-4237-A4A1-65E55AE233EE}"/>
+                <a16:creationId xmlns:a16="http://schemas.microsoft.com/office/drawing/2014/main" id="{68D6E73A-F2FB-4EE7-8510-AB985E3EFC5B}"/>
               </a:ext>
             </a:extLst>
           </p:cNvPr>
@@ -8821,7 +8851,7 @@
           <p:cNvPr id="7" name="">
             <a:extLst xmlns:a="http://schemas.openxmlformats.org/drawingml/2006/main">
               <a:ext uri="{FF2B5EF4-FFF2-40B4-BE49-F238E27FC236}">
-                <a16:creationId xmlns:a16="http://schemas.microsoft.com/office/drawing/2014/main" id="{926E04C2-22BD-4D9C-8CFA-D031D01072F7}"/>
+                <a16:creationId xmlns:a16="http://schemas.microsoft.com/office/drawing/2014/main" id="{E13B75B9-1FFF-43C2-B299-1B33049A76F3}"/>
               </a:ext>
             </a:extLst>
           </p:cNvPr>
@@ -8878,7 +8908,7 @@
           <p:cNvPr id="8" name="">
             <a:extLst xmlns:a="http://schemas.openxmlformats.org/drawingml/2006/main">
               <a:ext uri="{FF2B5EF4-FFF2-40B4-BE49-F238E27FC236}">
-                <a16:creationId xmlns:a16="http://schemas.microsoft.com/office/drawing/2014/main" id="{82DF9F06-7CF2-4AD0-B5A8-8945DCD2666D}"/>
+                <a16:creationId xmlns:a16="http://schemas.microsoft.com/office/drawing/2014/main" id="{AAA60F45-93ED-4B0E-849E-CF8A9412620E}"/>
               </a:ext>
             </a:extLst>
           </p:cNvPr>
@@ -8935,7 +8965,7 @@
           <p:cNvPr id="9" name="">
             <a:extLst xmlns:a="http://schemas.openxmlformats.org/drawingml/2006/main">
               <a:ext uri="{FF2B5EF4-FFF2-40B4-BE49-F238E27FC236}">
-                <a16:creationId xmlns:a16="http://schemas.microsoft.com/office/drawing/2014/main" id="{58390317-A7AB-4D28-961B-8410E7BFCD11}"/>
+                <a16:creationId xmlns:a16="http://schemas.microsoft.com/office/drawing/2014/main" id="{8FB13071-EF5C-49B0-B96B-2836020423B1}"/>
               </a:ext>
             </a:extLst>
           </p:cNvPr>
@@ -8992,7 +9022,7 @@
           <p:cNvPr id="10" name="">
             <a:extLst xmlns:a="http://schemas.openxmlformats.org/drawingml/2006/main">
               <a:ext uri="{FF2B5EF4-FFF2-40B4-BE49-F238E27FC236}">
-                <a16:creationId xmlns:a16="http://schemas.microsoft.com/office/drawing/2014/main" id="{3B3BA82B-86BC-4C43-8C6C-046000C4AC93}"/>
+                <a16:creationId xmlns:a16="http://schemas.microsoft.com/office/drawing/2014/main" id="{2DEE1B21-1CD0-469D-8572-361BCA76E7B6}"/>
               </a:ext>
             </a:extLst>
           </p:cNvPr>
@@ -9049,7 +9079,7 @@
           <p:cNvPr id="11" name="">
             <a:extLst xmlns:a="http://schemas.openxmlformats.org/drawingml/2006/main">
               <a:ext uri="{FF2B5EF4-FFF2-40B4-BE49-F238E27FC236}">
-                <a16:creationId xmlns:a16="http://schemas.microsoft.com/office/drawing/2014/main" id="{C7F9542D-7B48-4A0D-B2F1-C597E182A4FE}"/>
+                <a16:creationId xmlns:a16="http://schemas.microsoft.com/office/drawing/2014/main" id="{DF49FCAF-600A-4356-B018-86CFA3E257F9}"/>
               </a:ext>
             </a:extLst>
           </p:cNvPr>
@@ -9096,7 +9126,7 @@
                 <a:ea typeface="Arial"/>
                 <a:cs typeface="Arial"/>
               </a:rPr>
-              <a:t>9. September 2026     5 / 16</a:t>
+              <a:t>11. September 2026     5 / 16</a:t>
             </a:r>
           </a:p>
         </p:txBody>
@@ -9104,7 +9134,7 @@
     </p:spTree>
     <p:extLst>
       <p:ext uri="{BB962C8B-B14F-4D97-AF65-F5344CB8AC3E}">
-        <p14:creationId xmlns:p14="http://schemas.microsoft.com/office/powerpoint/2010/main" val="73626406"/>
+        <p14:creationId xmlns:p14="http://schemas.microsoft.com/office/powerpoint/2010/main" val="2044546466"/>
       </p:ext>
     </p:extLst>
   </p:cSld>
@@ -9135,7 +9165,7 @@
           <p:cNvPr id="10" name="">
             <a:extLst xmlns:a="http://schemas.openxmlformats.org/drawingml/2006/main">
               <a:ext uri="{FF2B5EF4-FFF2-40B4-BE49-F238E27FC236}">
-                <a16:creationId xmlns:a16="http://schemas.microsoft.com/office/drawing/2014/main" id="{8CCA9AE2-E153-4906-B340-3AECB1B604B4}"/>
+                <a16:creationId xmlns:a16="http://schemas.microsoft.com/office/drawing/2014/main" id="{36C82EF0-9304-458E-B293-5F7901C710E5}"/>
               </a:ext>
             </a:extLst>
           </p:cNvPr>
@@ -9192,7 +9222,7 @@
           <p:cNvPr id="2" name="">
             <a:extLst xmlns:a="http://schemas.openxmlformats.org/drawingml/2006/main">
               <a:ext uri="{FF2B5EF4-FFF2-40B4-BE49-F238E27FC236}">
-                <a16:creationId xmlns:a16="http://schemas.microsoft.com/office/drawing/2014/main" id="{9F5749E5-51F1-42DD-889D-A7AD6DE21A3F}"/>
+                <a16:creationId xmlns:a16="http://schemas.microsoft.com/office/drawing/2014/main" id="{D250C1B8-1302-41DC-995F-774A77F12FCD}"/>
               </a:ext>
             </a:extLst>
           </p:cNvPr>
@@ -9249,7 +9279,7 @@
           <p:cNvPr id="3" name="">
             <a:extLst xmlns:a="http://schemas.openxmlformats.org/drawingml/2006/main">
               <a:ext uri="{FF2B5EF4-FFF2-40B4-BE49-F238E27FC236}">
-                <a16:creationId xmlns:a16="http://schemas.microsoft.com/office/drawing/2014/main" id="{9FD784A2-87F4-41DA-BE3A-AFBCA3A06753}"/>
+                <a16:creationId xmlns:a16="http://schemas.microsoft.com/office/drawing/2014/main" id="{E1BD717D-4465-4129-A944-2A21CB569521}"/>
               </a:ext>
             </a:extLst>
           </p:cNvPr>
@@ -9306,7 +9336,7 @@
           <p:cNvPr id="4" name="">
             <a:extLst xmlns:a="http://schemas.openxmlformats.org/drawingml/2006/main">
               <a:ext uri="{FF2B5EF4-FFF2-40B4-BE49-F238E27FC236}">
-                <a16:creationId xmlns:a16="http://schemas.microsoft.com/office/drawing/2014/main" id="{5D100941-1720-412C-A707-D1D39251C7AF}"/>
+                <a16:creationId xmlns:a16="http://schemas.microsoft.com/office/drawing/2014/main" id="{009F682E-539E-41C4-B335-8754ABE3F59F}"/>
               </a:ext>
             </a:extLst>
           </p:cNvPr>
@@ -9363,7 +9393,7 @@
           <p:cNvPr id="5" name="">
             <a:extLst xmlns:a="http://schemas.openxmlformats.org/drawingml/2006/main">
               <a:ext uri="{FF2B5EF4-FFF2-40B4-BE49-F238E27FC236}">
-                <a16:creationId xmlns:a16="http://schemas.microsoft.com/office/drawing/2014/main" id="{28C7A42C-0C87-4958-BBFE-5416D6937B6C}"/>
+                <a16:creationId xmlns:a16="http://schemas.microsoft.com/office/drawing/2014/main" id="{4614DE8D-9EDC-4F80-8A4B-4121281F0468}"/>
               </a:ext>
             </a:extLst>
           </p:cNvPr>
@@ -9420,7 +9450,7 @@
           <p:cNvPr id="6" name="">
             <a:extLst xmlns:a="http://schemas.openxmlformats.org/drawingml/2006/main">
               <a:ext uri="{FF2B5EF4-FFF2-40B4-BE49-F238E27FC236}">
-                <a16:creationId xmlns:a16="http://schemas.microsoft.com/office/drawing/2014/main" id="{A3326023-E13E-4337-BEB4-D4E3E6A734A3}"/>
+                <a16:creationId xmlns:a16="http://schemas.microsoft.com/office/drawing/2014/main" id="{1D2F1DAC-64BC-45CF-ABC7-2886CA075D21}"/>
               </a:ext>
             </a:extLst>
           </p:cNvPr>
@@ -9477,7 +9507,7 @@
           <p:cNvPr id="7" name="">
             <a:extLst xmlns:a="http://schemas.openxmlformats.org/drawingml/2006/main">
               <a:ext uri="{FF2B5EF4-FFF2-40B4-BE49-F238E27FC236}">
-                <a16:creationId xmlns:a16="http://schemas.microsoft.com/office/drawing/2014/main" id="{79CABA90-72E9-45C1-B3D1-07FF55941900}"/>
+                <a16:creationId xmlns:a16="http://schemas.microsoft.com/office/drawing/2014/main" id="{367AD0AC-04FC-412D-B5A2-5F76F64F5FD1}"/>
               </a:ext>
             </a:extLst>
           </p:cNvPr>
@@ -9534,7 +9564,7 @@
           <p:cNvPr id="8" name="">
             <a:extLst xmlns:a="http://schemas.openxmlformats.org/drawingml/2006/main">
               <a:ext uri="{FF2B5EF4-FFF2-40B4-BE49-F238E27FC236}">
-                <a16:creationId xmlns:a16="http://schemas.microsoft.com/office/drawing/2014/main" id="{93C366C2-AA72-4A58-BEC9-FAD69260DF26}"/>
+                <a16:creationId xmlns:a16="http://schemas.microsoft.com/office/drawing/2014/main" id="{3363E192-D0FC-4286-9C48-136452302386}"/>
               </a:ext>
             </a:extLst>
           </p:cNvPr>
@@ -9591,7 +9621,7 @@
           <p:cNvPr id="9" name="">
             <a:extLst xmlns:a="http://schemas.openxmlformats.org/drawingml/2006/main">
               <a:ext uri="{FF2B5EF4-FFF2-40B4-BE49-F238E27FC236}">
-                <a16:creationId xmlns:a16="http://schemas.microsoft.com/office/drawing/2014/main" id="{D586852F-37BA-4292-9FDD-491722F6C7F1}"/>
+                <a16:creationId xmlns:a16="http://schemas.microsoft.com/office/drawing/2014/main" id="{31B47363-8453-4CA7-8DCA-92E8A2586EA0}"/>
               </a:ext>
             </a:extLst>
           </p:cNvPr>
@@ -9638,7 +9668,7 @@
                 <a:ea typeface="Arial"/>
                 <a:cs typeface="Arial"/>
               </a:rPr>
-              <a:t>9. September 2026     6 / 16</a:t>
+              <a:t>11. September 2026     6 / 16</a:t>
             </a:r>
           </a:p>
         </p:txBody>
@@ -9646,7 +9676,7 @@
     </p:spTree>
     <p:extLst>
       <p:ext uri="{BB962C8B-B14F-4D97-AF65-F5344CB8AC3E}">
-        <p14:creationId xmlns:p14="http://schemas.microsoft.com/office/powerpoint/2010/main" val="1354184013"/>
+        <p14:creationId xmlns:p14="http://schemas.microsoft.com/office/powerpoint/2010/main" val="1636583884"/>
       </p:ext>
     </p:extLst>
   </p:cSld>
@@ -9677,7 +9707,7 @@
           <p:cNvPr id="5" name="">
             <a:extLst xmlns:a="http://schemas.openxmlformats.org/drawingml/2006/main">
               <a:ext uri="{FF2B5EF4-FFF2-40B4-BE49-F238E27FC236}">
-                <a16:creationId xmlns:a16="http://schemas.microsoft.com/office/drawing/2014/main" id="{B396ECBC-2774-42DB-AFD9-16EBAA1EF3AC}"/>
+                <a16:creationId xmlns:a16="http://schemas.microsoft.com/office/drawing/2014/main" id="{6A513FA7-01FA-45BA-A687-E905D2141C14}"/>
               </a:ext>
             </a:extLst>
           </p:cNvPr>
@@ -9734,7 +9764,7 @@
           <p:cNvPr id="2" name="">
             <a:extLst xmlns:a="http://schemas.openxmlformats.org/drawingml/2006/main">
               <a:ext uri="{FF2B5EF4-FFF2-40B4-BE49-F238E27FC236}">
-                <a16:creationId xmlns:a16="http://schemas.microsoft.com/office/drawing/2014/main" id="{D6C7F2B5-577E-4349-B229-F34D18B60CBE}"/>
+                <a16:creationId xmlns:a16="http://schemas.microsoft.com/office/drawing/2014/main" id="{FE1491CA-8283-44EE-B6EF-1172B9CD5961}"/>
               </a:ext>
             </a:extLst>
           </p:cNvPr>
@@ -10055,7 +10085,7 @@
           <p:cNvPr id="4" name="">
             <a:extLst xmlns:a="http://schemas.openxmlformats.org/drawingml/2006/main">
               <a:ext uri="{FF2B5EF4-FFF2-40B4-BE49-F238E27FC236}">
-                <a16:creationId xmlns:a16="http://schemas.microsoft.com/office/drawing/2014/main" id="{65C9A9D0-F375-4A9E-B2BD-9A6A4C7FDEE9}"/>
+                <a16:creationId xmlns:a16="http://schemas.microsoft.com/office/drawing/2014/main" id="{66A9FC87-1B2B-4A3E-B4D8-B0A6B1C2BA16}"/>
               </a:ext>
             </a:extLst>
           </p:cNvPr>
@@ -10102,7 +10132,7 @@
                 <a:ea typeface="Arial"/>
                 <a:cs typeface="Arial"/>
               </a:rPr>
-              <a:t>9. September 2026     7 / 16</a:t>
+              <a:t>11. September 2026     7 / 16</a:t>
             </a:r>
           </a:p>
         </p:txBody>
@@ -10110,7 +10140,7 @@
     </p:spTree>
     <p:extLst>
       <p:ext uri="{BB962C8B-B14F-4D97-AF65-F5344CB8AC3E}">
-        <p14:creationId xmlns:p14="http://schemas.microsoft.com/office/powerpoint/2010/main" val="1155204127"/>
+        <p14:creationId xmlns:p14="http://schemas.microsoft.com/office/powerpoint/2010/main" val="752809064"/>
       </p:ext>
     </p:extLst>
   </p:cSld>
@@ -10141,7 +10171,7 @@
           <p:cNvPr id="8" name="">
             <a:extLst xmlns:a="http://schemas.openxmlformats.org/drawingml/2006/main">
               <a:ext uri="{FF2B5EF4-FFF2-40B4-BE49-F238E27FC236}">
-                <a16:creationId xmlns:a16="http://schemas.microsoft.com/office/drawing/2014/main" id="{CEA391AE-7DF5-4DAE-A0AC-A07EBA54B6E8}"/>
+                <a16:creationId xmlns:a16="http://schemas.microsoft.com/office/drawing/2014/main" id="{6957CC48-7A30-47A9-9B42-ABBED375F059}"/>
               </a:ext>
             </a:extLst>
           </p:cNvPr>
@@ -10198,7 +10228,7 @@
           <p:cNvPr id="2" name="">
             <a:extLst xmlns:a="http://schemas.openxmlformats.org/drawingml/2006/main">
               <a:ext uri="{FF2B5EF4-FFF2-40B4-BE49-F238E27FC236}">
-                <a16:creationId xmlns:a16="http://schemas.microsoft.com/office/drawing/2014/main" id="{A0A56D82-4FF4-43E7-A4B0-8BBE0F941175}"/>
+                <a16:creationId xmlns:a16="http://schemas.microsoft.com/office/drawing/2014/main" id="{484F6772-9291-4213-8C15-ED5B87FB5462}"/>
               </a:ext>
             </a:extLst>
           </p:cNvPr>
@@ -10255,7 +10285,7 @@
           <p:cNvPr id="3" name="">
             <a:extLst xmlns:a="http://schemas.openxmlformats.org/drawingml/2006/main">
               <a:ext uri="{FF2B5EF4-FFF2-40B4-BE49-F238E27FC236}">
-                <a16:creationId xmlns:a16="http://schemas.microsoft.com/office/drawing/2014/main" id="{189FCD5A-B41B-4658-B8FF-B57E4E3AF6F1}"/>
+                <a16:creationId xmlns:a16="http://schemas.microsoft.com/office/drawing/2014/main" id="{C0521A20-E018-4046-AEF9-5EAD7FA77291}"/>
               </a:ext>
             </a:extLst>
           </p:cNvPr>
@@ -10312,7 +10342,7 @@
           <p:cNvPr id="4" name="">
             <a:extLst xmlns:a="http://schemas.openxmlformats.org/drawingml/2006/main">
               <a:ext uri="{FF2B5EF4-FFF2-40B4-BE49-F238E27FC236}">
-                <a16:creationId xmlns:a16="http://schemas.microsoft.com/office/drawing/2014/main" id="{52E0978E-D67A-4F36-B895-A0CAA7DF402A}"/>
+                <a16:creationId xmlns:a16="http://schemas.microsoft.com/office/drawing/2014/main" id="{EA2BA38B-49B4-492E-927F-BB7595168403}"/>
               </a:ext>
             </a:extLst>
           </p:cNvPr>
@@ -10392,7 +10422,7 @@
           <p:cNvPr id="5" name="">
             <a:extLst xmlns:a="http://schemas.openxmlformats.org/drawingml/2006/main">
               <a:ext uri="{FF2B5EF4-FFF2-40B4-BE49-F238E27FC236}">
-                <a16:creationId xmlns:a16="http://schemas.microsoft.com/office/drawing/2014/main" id="{5F50025E-21C0-4C74-8533-89C3DB75B199}"/>
+                <a16:creationId xmlns:a16="http://schemas.microsoft.com/office/drawing/2014/main" id="{030137D1-B71D-4D40-938A-AC21E74ACD5F}"/>
               </a:ext>
             </a:extLst>
           </p:cNvPr>
@@ -10449,7 +10479,7 @@
           <p:cNvPr id="6" name="">
             <a:extLst xmlns:a="http://schemas.openxmlformats.org/drawingml/2006/main">
               <a:ext uri="{FF2B5EF4-FFF2-40B4-BE49-F238E27FC236}">
-                <a16:creationId xmlns:a16="http://schemas.microsoft.com/office/drawing/2014/main" id="{23D050DC-1A3A-4FF0-91DD-EF9881622ED5}"/>
+                <a16:creationId xmlns:a16="http://schemas.microsoft.com/office/drawing/2014/main" id="{5F5ABE95-D231-4300-8F69-74D068485A56}"/>
               </a:ext>
             </a:extLst>
           </p:cNvPr>
@@ -10529,7 +10559,7 @@
           <p:cNvPr id="7" name="">
             <a:extLst xmlns:a="http://schemas.openxmlformats.org/drawingml/2006/main">
               <a:ext uri="{FF2B5EF4-FFF2-40B4-BE49-F238E27FC236}">
-                <a16:creationId xmlns:a16="http://schemas.microsoft.com/office/drawing/2014/main" id="{E9A50E25-5D06-435A-97BF-17416DBABC5D}"/>
+                <a16:creationId xmlns:a16="http://schemas.microsoft.com/office/drawing/2014/main" id="{8A4BF8F6-FC37-4E54-B13D-E10BB5D6C7F5}"/>
               </a:ext>
             </a:extLst>
           </p:cNvPr>
@@ -10576,7 +10606,7 @@
                 <a:ea typeface="Arial"/>
                 <a:cs typeface="Arial"/>
               </a:rPr>
-              <a:t>9. September 2026     8 / 16</a:t>
+              <a:t>11. September 2026     8 / 16</a:t>
             </a:r>
           </a:p>
         </p:txBody>
@@ -10584,7 +10614,7 @@
     </p:spTree>
     <p:extLst>
       <p:ext uri="{BB962C8B-B14F-4D97-AF65-F5344CB8AC3E}">
-        <p14:creationId xmlns:p14="http://schemas.microsoft.com/office/powerpoint/2010/main" val="1016940625"/>
+        <p14:creationId xmlns:p14="http://schemas.microsoft.com/office/powerpoint/2010/main" val="1484899114"/>
       </p:ext>
     </p:extLst>
   </p:cSld>
@@ -10615,7 +10645,7 @@
           <p:cNvPr id="12" name="">
             <a:extLst xmlns:a="http://schemas.openxmlformats.org/drawingml/2006/main">
               <a:ext uri="{FF2B5EF4-FFF2-40B4-BE49-F238E27FC236}">
-                <a16:creationId xmlns:a16="http://schemas.microsoft.com/office/drawing/2014/main" id="{7A2C29CB-BB53-4572-B6F5-8E8B83D7A8AC}"/>
+                <a16:creationId xmlns:a16="http://schemas.microsoft.com/office/drawing/2014/main" id="{6B1F7C0B-0587-4675-BECF-00380A3357B9}"/>
               </a:ext>
             </a:extLst>
           </p:cNvPr>
@@ -10672,7 +10702,7 @@
           <p:cNvPr id="2" name="">
             <a:extLst xmlns:a="http://schemas.openxmlformats.org/drawingml/2006/main">
               <a:ext uri="{FF2B5EF4-FFF2-40B4-BE49-F238E27FC236}">
-                <a16:creationId xmlns:a16="http://schemas.microsoft.com/office/drawing/2014/main" id="{8E2474F0-582F-4C4F-BD79-655581AE9D44}"/>
+                <a16:creationId xmlns:a16="http://schemas.microsoft.com/office/drawing/2014/main" id="{4CD1FC0F-6DF9-4921-9F08-39DE0FCFC956}"/>
               </a:ext>
             </a:extLst>
           </p:cNvPr>
@@ -10729,7 +10759,7 @@
           <p:cNvPr id="3" name="">
             <a:extLst xmlns:a="http://schemas.openxmlformats.org/drawingml/2006/main">
               <a:ext uri="{FF2B5EF4-FFF2-40B4-BE49-F238E27FC236}">
-                <a16:creationId xmlns:a16="http://schemas.microsoft.com/office/drawing/2014/main" id="{D42952C4-20CF-44B8-8B5A-A46498EFE23E}"/>
+                <a16:creationId xmlns:a16="http://schemas.microsoft.com/office/drawing/2014/main" id="{E91D2561-78E1-4A6E-9C43-179461C4E03D}"/>
               </a:ext>
             </a:extLst>
           </p:cNvPr>
@@ -10786,7 +10816,7 @@
           <p:cNvPr id="4" name="">
             <a:extLst xmlns:a="http://schemas.openxmlformats.org/drawingml/2006/main">
               <a:ext uri="{FF2B5EF4-FFF2-40B4-BE49-F238E27FC236}">
-                <a16:creationId xmlns:a16="http://schemas.microsoft.com/office/drawing/2014/main" id="{7C6DD477-CC38-492C-B334-0B3230FB198C}"/>
+                <a16:creationId xmlns:a16="http://schemas.microsoft.com/office/drawing/2014/main" id="{1CC216D5-A816-44A4-873A-8E74BC86BEB2}"/>
               </a:ext>
             </a:extLst>
           </p:cNvPr>
@@ -10843,7 +10873,7 @@
           <p:cNvPr id="5" name="">
             <a:extLst xmlns:a="http://schemas.openxmlformats.org/drawingml/2006/main">
               <a:ext uri="{FF2B5EF4-FFF2-40B4-BE49-F238E27FC236}">
-                <a16:creationId xmlns:a16="http://schemas.microsoft.com/office/drawing/2014/main" id="{7886C0C2-EDC8-42A5-9CE8-52E2732DD93E}"/>
+                <a16:creationId xmlns:a16="http://schemas.microsoft.com/office/drawing/2014/main" id="{31F87232-28B8-4A53-9760-155D5B97F3DD}"/>
               </a:ext>
             </a:extLst>
           </p:cNvPr>
@@ -10900,7 +10930,7 @@
           <p:cNvPr id="6" name="">
             <a:extLst xmlns:a="http://schemas.openxmlformats.org/drawingml/2006/main">
               <a:ext uri="{FF2B5EF4-FFF2-40B4-BE49-F238E27FC236}">
-                <a16:creationId xmlns:a16="http://schemas.microsoft.com/office/drawing/2014/main" id="{39DA2330-DC3A-48ED-9430-51EB67D1E8D3}"/>
+                <a16:creationId xmlns:a16="http://schemas.microsoft.com/office/drawing/2014/main" id="{EE43BC12-997B-4A08-91FA-AE74995A9F68}"/>
               </a:ext>
             </a:extLst>
           </p:cNvPr>
@@ -10957,7 +10987,7 @@
           <p:cNvPr id="7" name="">
             <a:extLst xmlns:a="http://schemas.openxmlformats.org/drawingml/2006/main">
               <a:ext uri="{FF2B5EF4-FFF2-40B4-BE49-F238E27FC236}">
-                <a16:creationId xmlns:a16="http://schemas.microsoft.com/office/drawing/2014/main" id="{0B69EFD3-131C-44E4-B9FC-B8114C902273}"/>
+                <a16:creationId xmlns:a16="http://schemas.microsoft.com/office/drawing/2014/main" id="{5417A960-F1B1-4C65-AF5F-BF63F490AF48}"/>
               </a:ext>
             </a:extLst>
           </p:cNvPr>
@@ -11014,7 +11044,7 @@
           <p:cNvPr id="8" name="">
             <a:extLst xmlns:a="http://schemas.openxmlformats.org/drawingml/2006/main">
               <a:ext uri="{FF2B5EF4-FFF2-40B4-BE49-F238E27FC236}">
-                <a16:creationId xmlns:a16="http://schemas.microsoft.com/office/drawing/2014/main" id="{20F073CD-4F25-4851-9E17-EAFACA802ECF}"/>
+                <a16:creationId xmlns:a16="http://schemas.microsoft.com/office/drawing/2014/main" id="{6E0E8B9A-0756-4E69-925E-5E06BEDBDEC2}"/>
               </a:ext>
             </a:extLst>
           </p:cNvPr>
@@ -11071,7 +11101,7 @@
           <p:cNvPr id="9" name="">
             <a:extLst xmlns:a="http://schemas.openxmlformats.org/drawingml/2006/main">
               <a:ext uri="{FF2B5EF4-FFF2-40B4-BE49-F238E27FC236}">
-                <a16:creationId xmlns:a16="http://schemas.microsoft.com/office/drawing/2014/main" id="{6BC2E620-6884-46C0-84BC-B4CB9677BE87}"/>
+                <a16:creationId xmlns:a16="http://schemas.microsoft.com/office/drawing/2014/main" id="{F8F8FF3E-B154-4139-9E20-12323FDC9251}"/>
               </a:ext>
             </a:extLst>
           </p:cNvPr>
@@ -11128,7 +11158,7 @@
           <p:cNvPr id="10" name="">
             <a:extLst xmlns:a="http://schemas.openxmlformats.org/drawingml/2006/main">
               <a:ext uri="{FF2B5EF4-FFF2-40B4-BE49-F238E27FC236}">
-                <a16:creationId xmlns:a16="http://schemas.microsoft.com/office/drawing/2014/main" id="{3CE9A5D3-9DDC-469D-98B7-5D02B1457DBE}"/>
+                <a16:creationId xmlns:a16="http://schemas.microsoft.com/office/drawing/2014/main" id="{09F8CAD4-C733-4F6F-92A3-2284AB68111F}"/>
               </a:ext>
             </a:extLst>
           </p:cNvPr>
@@ -11185,7 +11215,7 @@
           <p:cNvPr id="11" name="">
             <a:extLst xmlns:a="http://schemas.openxmlformats.org/drawingml/2006/main">
               <a:ext uri="{FF2B5EF4-FFF2-40B4-BE49-F238E27FC236}">
-                <a16:creationId xmlns:a16="http://schemas.microsoft.com/office/drawing/2014/main" id="{B7E79030-A0EF-412F-91F9-D840628EC762}"/>
+                <a16:creationId xmlns:a16="http://schemas.microsoft.com/office/drawing/2014/main" id="{299F7A10-7288-45F9-9479-D2B4FF2C6D1D}"/>
               </a:ext>
             </a:extLst>
           </p:cNvPr>
@@ -11232,7 +11262,7 @@
                 <a:ea typeface="Arial"/>
                 <a:cs typeface="Arial"/>
               </a:rPr>
-              <a:t>9. September 2026     9 / 16</a:t>
+              <a:t>11. September 2026     9 / 16</a:t>
             </a:r>
           </a:p>
         </p:txBody>
@@ -11240,7 +11270,7 @@
     </p:spTree>
     <p:extLst>
       <p:ext uri="{BB962C8B-B14F-4D97-AF65-F5344CB8AC3E}">
-        <p14:creationId xmlns:p14="http://schemas.microsoft.com/office/powerpoint/2010/main" val="2026165504"/>
+        <p14:creationId xmlns:p14="http://schemas.microsoft.com/office/powerpoint/2010/main" val="363196355"/>
       </p:ext>
     </p:extLst>
   </p:cSld>
